--- a/slides/slides.pptx
+++ b/slides/slides.pptx
@@ -8479,7 +8479,7 @@
       </p:sp>
       <p:pic>
         <p:nvPicPr>
-          <p:cNvPr id="47" name="Picture 46" descr="icon0014.png"/>
+          <p:cNvPr id="47" name="Picture 46" descr="icon0013.png"/>
           <p:cNvPicPr>
             <a:picLocks noChangeAspect="1"/>
           </p:cNvPicPr>
@@ -10401,7 +10401,7 @@
       </p:sp>
       <p:pic>
         <p:nvPicPr>
-          <p:cNvPr id="43" name="Picture 42" descr="icon0014.png"/>
+          <p:cNvPr id="43" name="Picture 42" descr="icon0013.png"/>
           <p:cNvPicPr>
             <a:picLocks noChangeAspect="1"/>
           </p:cNvPicPr>
@@ -13436,7 +13436,7 @@
       </p:sp>
       <p:pic>
         <p:nvPicPr>
-          <p:cNvPr id="69" name="Picture 68" descr="icon0021.png"/>
+          <p:cNvPr id="69" name="Picture 68" descr="icon0013.png"/>
           <p:cNvPicPr>
             <a:picLocks noChangeAspect="1"/>
           </p:cNvPicPr>

--- a/slides/slides.pptx
+++ b/slides/slides.pptx
@@ -4219,8 +4219,8 @@
         </p:nvSpPr>
         <p:spPr>
           <a:xfrm>
-            <a:off x="0" y="6010275"/>
-            <a:ext cx="12192000" cy="847725"/>
+            <a:off x="0" y="6007893"/>
+            <a:ext cx="12192000" cy="850106"/>
           </a:xfrm>
           <a:prstGeom prst="rect">
             <a:avLst/>
@@ -4263,8 +4263,8 @@
         </p:nvSpPr>
         <p:spPr>
           <a:xfrm>
-            <a:off x="685800" y="6457950"/>
-            <a:ext cx="6856952" cy="423862"/>
+            <a:off x="685800" y="6467475"/>
+            <a:ext cx="6897719" cy="431006"/>
           </a:xfrm>
           <a:prstGeom prst="rect">
             <a:avLst/>
@@ -4279,7 +4279,7 @@
           <a:p>
             <a:pPr algn="l">
               <a:lnSpc>
-                <a:spcPts val="1631"/>
+                <a:spcPts val="1575"/>
               </a:lnSpc>
               <a:spcBef>
                 <a:spcPts val="0"/>
@@ -4289,7 +4289,7 @@
               </a:spcAft>
             </a:pPr>
             <a:r>
-              <a:rPr sz="1087" b="0" i="0">
+              <a:rPr sz="1050" b="0" i="0">
                 <a:solidFill>
                   <a:srgbClr val="FFFFFF"/>
                 </a:solidFill>
@@ -4308,8 +4308,8 @@
         </p:nvSpPr>
         <p:spPr>
           <a:xfrm>
-            <a:off x="685800" y="6231731"/>
-            <a:ext cx="6914102" cy="150018"/>
+            <a:off x="685800" y="6236493"/>
+            <a:ext cx="6954869" cy="164306"/>
           </a:xfrm>
           <a:prstGeom prst="rect">
             <a:avLst/>
@@ -4324,7 +4324,7 @@
           <a:p>
             <a:pPr algn="l">
               <a:lnSpc>
-                <a:spcPts val="1181"/>
+                <a:spcPts val="1293"/>
               </a:lnSpc>
               <a:spcBef>
                 <a:spcPts val="0"/>
@@ -4334,7 +4334,7 @@
               </a:spcAft>
             </a:pPr>
             <a:r>
-              <a:rPr sz="787" b="0" i="0" spc="110">
+              <a:rPr sz="862" b="0" i="0" spc="121">
                 <a:solidFill>
                   <a:srgbClr val="C2A0AE"/>
                 </a:solidFill>
@@ -4353,8 +4353,8 @@
         </p:nvSpPr>
         <p:spPr>
           <a:xfrm>
-            <a:off x="8076152" y="6457950"/>
-            <a:ext cx="1182147" cy="423862"/>
+            <a:off x="8116919" y="6467475"/>
+            <a:ext cx="1141380" cy="431006"/>
           </a:xfrm>
           <a:prstGeom prst="rect">
             <a:avLst/>
@@ -4369,7 +4369,7 @@
           <a:p>
             <a:pPr algn="l">
               <a:lnSpc>
-                <a:spcPts val="1631"/>
+                <a:spcPts val="1575"/>
               </a:lnSpc>
               <a:spcBef>
                 <a:spcPts val="0"/>
@@ -4379,7 +4379,7 @@
               </a:spcAft>
             </a:pPr>
             <a:r>
-              <a:rPr sz="1087" b="0" i="0">
+              <a:rPr sz="1050" b="0" i="0">
                 <a:solidFill>
                   <a:srgbClr val="FFFFFF"/>
                 </a:solidFill>
@@ -4398,8 +4398,8 @@
         </p:nvSpPr>
         <p:spPr>
           <a:xfrm>
-            <a:off x="8076152" y="6231731"/>
-            <a:ext cx="1239297" cy="150018"/>
+            <a:off x="8116919" y="6236493"/>
+            <a:ext cx="1198530" cy="164306"/>
           </a:xfrm>
           <a:prstGeom prst="rect">
             <a:avLst/>
@@ -4414,7 +4414,7 @@
           <a:p>
             <a:pPr algn="l">
               <a:lnSpc>
-                <a:spcPts val="1181"/>
+                <a:spcPts val="1293"/>
               </a:lnSpc>
               <a:spcBef>
                 <a:spcPts val="0"/>
@@ -4424,7 +4424,7 @@
               </a:spcAft>
             </a:pPr>
             <a:r>
-              <a:rPr sz="787" b="0" i="0" spc="110">
+              <a:rPr sz="862" b="0" i="0" spc="121">
                 <a:solidFill>
                   <a:srgbClr val="C2A0AE"/>
                 </a:solidFill>
@@ -4451,7 +4451,7 @@
         </p:blipFill>
         <p:spPr>
           <a:xfrm>
-            <a:off x="9791700" y="6219825"/>
+            <a:off x="9791700" y="6218682"/>
             <a:ext cx="1714500" cy="428625"/>
           </a:xfrm>
           <a:prstGeom prst="rect">
@@ -4659,7 +4659,7 @@
         </p:nvSpPr>
         <p:spPr>
           <a:xfrm>
-            <a:off x="609600" y="1671637"/>
+            <a:off x="609600" y="1688782"/>
             <a:ext cx="10972800" cy="2199513"/>
           </a:xfrm>
           <a:prstGeom prst="roundRect">
@@ -4705,8 +4705,8 @@
         </p:nvSpPr>
         <p:spPr>
           <a:xfrm>
-            <a:off x="809625" y="1604962"/>
-            <a:ext cx="2512409" cy="114300"/>
+            <a:off x="809625" y="1622107"/>
+            <a:ext cx="2618803" cy="114300"/>
           </a:xfrm>
           <a:prstGeom prst="rect">
             <a:avLst/>
@@ -4748,7 +4748,7 @@
               </a:spcAft>
             </a:pPr>
             <a:r>
-              <a:rPr sz="825" b="1" i="0" spc="82">
+              <a:rPr sz="862" b="1" i="0" spc="86">
                 <a:solidFill>
                   <a:srgbClr val="5F1937"/>
                 </a:solidFill>
@@ -4767,7 +4767,7 @@
         </p:nvSpPr>
         <p:spPr>
           <a:xfrm>
-            <a:off x="1557337" y="1938337"/>
+            <a:off x="1557337" y="1955482"/>
             <a:ext cx="876300" cy="876300"/>
           </a:xfrm>
           <a:prstGeom prst="ellipse">
@@ -4827,7 +4827,7 @@
         </p:blipFill>
         <p:spPr>
           <a:xfrm>
-            <a:off x="1785937" y="2166937"/>
+            <a:off x="1785937" y="2184082"/>
             <a:ext cx="419100" cy="419100"/>
           </a:xfrm>
           <a:prstGeom prst="rect">
@@ -4843,7 +4843,7 @@
         </p:nvSpPr>
         <p:spPr>
           <a:xfrm>
-            <a:off x="847725" y="2967037"/>
+            <a:off x="847725" y="2984182"/>
             <a:ext cx="2295525" cy="419100"/>
           </a:xfrm>
           <a:prstGeom prst="roundRect">
@@ -4910,7 +4910,7 @@
         </p:nvSpPr>
         <p:spPr>
           <a:xfrm>
-            <a:off x="819150" y="3481387"/>
+            <a:off x="819150" y="3498532"/>
             <a:ext cx="2352675" cy="199263"/>
           </a:xfrm>
           <a:prstGeom prst="rect">
@@ -4963,7 +4963,7 @@
         </p:blipFill>
         <p:spPr>
           <a:xfrm>
-            <a:off x="3238500" y="2233612"/>
+            <a:off x="3238500" y="2250757"/>
             <a:ext cx="247650" cy="285750"/>
           </a:xfrm>
           <a:prstGeom prst="rect">
@@ -4979,7 +4979,7 @@
         </p:nvSpPr>
         <p:spPr>
           <a:xfrm>
-            <a:off x="4291012" y="1938337"/>
+            <a:off x="4291012" y="1955482"/>
             <a:ext cx="876300" cy="876300"/>
           </a:xfrm>
           <a:prstGeom prst="ellipse">
@@ -5039,7 +5039,7 @@
         </p:blipFill>
         <p:spPr>
           <a:xfrm>
-            <a:off x="4519612" y="2166937"/>
+            <a:off x="4519612" y="2184082"/>
             <a:ext cx="419100" cy="419100"/>
           </a:xfrm>
           <a:prstGeom prst="rect">
@@ -5055,7 +5055,7 @@
         </p:nvSpPr>
         <p:spPr>
           <a:xfrm>
-            <a:off x="3581400" y="2967037"/>
+            <a:off x="3581400" y="2984182"/>
             <a:ext cx="2295525" cy="419100"/>
           </a:xfrm>
           <a:prstGeom prst="roundRect">
@@ -5122,7 +5122,7 @@
         </p:nvSpPr>
         <p:spPr>
           <a:xfrm>
-            <a:off x="3552825" y="3481387"/>
+            <a:off x="3552825" y="3498532"/>
             <a:ext cx="2352675" cy="199263"/>
           </a:xfrm>
           <a:prstGeom prst="rect">
@@ -5175,7 +5175,7 @@
         </p:blipFill>
         <p:spPr>
           <a:xfrm>
-            <a:off x="5972175" y="2233612"/>
+            <a:off x="5972175" y="2250757"/>
             <a:ext cx="247650" cy="285750"/>
           </a:xfrm>
           <a:prstGeom prst="rect">
@@ -5191,7 +5191,7 @@
         </p:nvSpPr>
         <p:spPr>
           <a:xfrm>
-            <a:off x="7024687" y="1938337"/>
+            <a:off x="7024687" y="1955482"/>
             <a:ext cx="876300" cy="876300"/>
           </a:xfrm>
           <a:prstGeom prst="ellipse">
@@ -5251,7 +5251,7 @@
         </p:blipFill>
         <p:spPr>
           <a:xfrm>
-            <a:off x="7253287" y="2166937"/>
+            <a:off x="7253287" y="2184082"/>
             <a:ext cx="419100" cy="419100"/>
           </a:xfrm>
           <a:prstGeom prst="rect">
@@ -5267,7 +5267,7 @@
         </p:nvSpPr>
         <p:spPr>
           <a:xfrm>
-            <a:off x="6315075" y="2967037"/>
+            <a:off x="6315075" y="2984182"/>
             <a:ext cx="2295525" cy="419100"/>
           </a:xfrm>
           <a:prstGeom prst="roundRect">
@@ -5334,7 +5334,7 @@
         </p:nvSpPr>
         <p:spPr>
           <a:xfrm>
-            <a:off x="6286500" y="3481387"/>
+            <a:off x="6286500" y="3498532"/>
             <a:ext cx="2352675" cy="199263"/>
           </a:xfrm>
           <a:prstGeom prst="rect">
@@ -5387,7 +5387,7 @@
         </p:blipFill>
         <p:spPr>
           <a:xfrm>
-            <a:off x="8705850" y="2233612"/>
+            <a:off x="8705850" y="2250757"/>
             <a:ext cx="247650" cy="285750"/>
           </a:xfrm>
           <a:prstGeom prst="rect">
@@ -5403,7 +5403,7 @@
         </p:nvSpPr>
         <p:spPr>
           <a:xfrm>
-            <a:off x="9758362" y="1938337"/>
+            <a:off x="9758362" y="1955482"/>
             <a:ext cx="876300" cy="876300"/>
           </a:xfrm>
           <a:prstGeom prst="ellipse">
@@ -5463,7 +5463,7 @@
         </p:blipFill>
         <p:spPr>
           <a:xfrm>
-            <a:off x="9986962" y="2166937"/>
+            <a:off x="9986962" y="2184082"/>
             <a:ext cx="419100" cy="419100"/>
           </a:xfrm>
           <a:prstGeom prst="rect">
@@ -5479,7 +5479,7 @@
         </p:nvSpPr>
         <p:spPr>
           <a:xfrm>
-            <a:off x="9048750" y="2967037"/>
+            <a:off x="9048750" y="2984182"/>
             <a:ext cx="2295525" cy="419100"/>
           </a:xfrm>
           <a:prstGeom prst="roundRect">
@@ -5546,7 +5546,7 @@
         </p:nvSpPr>
         <p:spPr>
           <a:xfrm>
-            <a:off x="9020175" y="3481387"/>
+            <a:off x="9020175" y="3498532"/>
             <a:ext cx="2352675" cy="199263"/>
           </a:xfrm>
           <a:prstGeom prst="rect">
@@ -5591,12 +5591,12 @@
         </p:nvSpPr>
         <p:spPr>
           <a:xfrm>
-            <a:off x="609600" y="4033075"/>
-            <a:ext cx="10972800" cy="1036129"/>
+            <a:off x="609600" y="4050220"/>
+            <a:ext cx="10972800" cy="1001934"/>
           </a:xfrm>
           <a:prstGeom prst="roundRect">
             <a:avLst>
-              <a:gd name="adj" fmla="val 9192"/>
+              <a:gd name="adj" fmla="val 9506"/>
             </a:avLst>
           </a:prstGeom>
           <a:noFill/>
@@ -5637,8 +5637,8 @@
         </p:nvSpPr>
         <p:spPr>
           <a:xfrm>
-            <a:off x="809625" y="3966400"/>
-            <a:ext cx="3006756" cy="114300"/>
+            <a:off x="809625" y="3983545"/>
+            <a:ext cx="3135630" cy="114300"/>
           </a:xfrm>
           <a:prstGeom prst="rect">
             <a:avLst/>
@@ -5680,7 +5680,7 @@
               </a:spcAft>
             </a:pPr>
             <a:r>
-              <a:rPr sz="825" b="1" i="0" spc="82">
+              <a:rPr sz="862" b="1" i="0" spc="86">
                 <a:solidFill>
                   <a:srgbClr val="5F1937"/>
                 </a:solidFill>
@@ -5707,7 +5707,7 @@
         </p:blipFill>
         <p:spPr>
           <a:xfrm>
-            <a:off x="847725" y="4306347"/>
+            <a:off x="847725" y="4317396"/>
             <a:ext cx="209550" cy="209550"/>
           </a:xfrm>
           <a:prstGeom prst="rect">
@@ -5723,8 +5723,8 @@
         </p:nvSpPr>
         <p:spPr>
           <a:xfrm>
-            <a:off x="1162050" y="4309300"/>
-            <a:ext cx="3383280" cy="222789"/>
+            <a:off x="1171575" y="4326445"/>
+            <a:ext cx="3198495" cy="210407"/>
           </a:xfrm>
           <a:prstGeom prst="rect">
             <a:avLst/>
@@ -5739,7 +5739,7 @@
           <a:p>
             <a:pPr algn="l">
               <a:lnSpc>
-                <a:spcPts val="1754"/>
+                <a:spcPts val="1657"/>
               </a:lnSpc>
               <a:spcBef>
                 <a:spcPts val="0"/>
@@ -5749,7 +5749,7 @@
               </a:spcAft>
             </a:pPr>
             <a:r>
-              <a:rPr sz="1350" b="0" i="0">
+              <a:rPr sz="1275" b="0" i="0">
                 <a:solidFill>
                   <a:srgbClr val="1A2430"/>
                 </a:solidFill>
@@ -5776,7 +5776,7 @@
         </p:blipFill>
         <p:spPr>
           <a:xfrm>
-            <a:off x="6219825" y="4306347"/>
+            <a:off x="6219825" y="4317396"/>
             <a:ext cx="209550" cy="209550"/>
           </a:xfrm>
           <a:prstGeom prst="rect">
@@ -5792,8 +5792,8 @@
         </p:nvSpPr>
         <p:spPr>
           <a:xfrm>
-            <a:off x="6534150" y="4309300"/>
-            <a:ext cx="3430905" cy="222789"/>
+            <a:off x="6543675" y="4326445"/>
+            <a:ext cx="3243548" cy="210407"/>
           </a:xfrm>
           <a:prstGeom prst="rect">
             <a:avLst/>
@@ -5808,7 +5808,7 @@
           <a:p>
             <a:pPr algn="l">
               <a:lnSpc>
-                <a:spcPts val="1754"/>
+                <a:spcPts val="1657"/>
               </a:lnSpc>
               <a:spcBef>
                 <a:spcPts val="0"/>
@@ -5818,7 +5818,7 @@
               </a:spcAft>
             </a:pPr>
             <a:r>
-              <a:rPr sz="1350" b="0" i="0">
+              <a:rPr sz="1275" b="0" i="0">
                 <a:solidFill>
                   <a:srgbClr val="1A2430"/>
                 </a:solidFill>
@@ -5845,7 +5845,7 @@
         </p:blipFill>
         <p:spPr>
           <a:xfrm>
-            <a:off x="847725" y="4652962"/>
+            <a:off x="847725" y="4642104"/>
             <a:ext cx="209550" cy="209550"/>
           </a:xfrm>
           <a:prstGeom prst="rect">
@@ -5861,8 +5861,8 @@
         </p:nvSpPr>
         <p:spPr>
           <a:xfrm>
-            <a:off x="1162050" y="4655915"/>
-            <a:ext cx="3306508" cy="222789"/>
+            <a:off x="1171575" y="4651152"/>
+            <a:ext cx="3126009" cy="210407"/>
           </a:xfrm>
           <a:prstGeom prst="rect">
             <a:avLst/>
@@ -5877,7 +5877,7 @@
           <a:p>
             <a:pPr algn="l">
               <a:lnSpc>
-                <a:spcPts val="1754"/>
+                <a:spcPts val="1657"/>
               </a:lnSpc>
               <a:spcBef>
                 <a:spcPts val="0"/>
@@ -5887,7 +5887,7 @@
               </a:spcAft>
             </a:pPr>
             <a:r>
-              <a:rPr sz="1350" b="0" i="0">
+              <a:rPr sz="1275" b="0" i="0">
                 <a:solidFill>
                   <a:srgbClr val="1A2430"/>
                 </a:solidFill>
@@ -5914,7 +5914,7 @@
         </p:blipFill>
         <p:spPr>
           <a:xfrm>
-            <a:off x="6219825" y="4652962"/>
+            <a:off x="6219825" y="4642104"/>
             <a:ext cx="209550" cy="209550"/>
           </a:xfrm>
           <a:prstGeom prst="rect">
@@ -5930,8 +5930,8 @@
         </p:nvSpPr>
         <p:spPr>
           <a:xfrm>
-            <a:off x="6534150" y="4655915"/>
-            <a:ext cx="3612356" cy="222789"/>
+            <a:off x="6543675" y="4651152"/>
+            <a:ext cx="3414903" cy="210407"/>
           </a:xfrm>
           <a:prstGeom prst="rect">
             <a:avLst/>
@@ -5946,7 +5946,7 @@
           <a:p>
             <a:pPr algn="l">
               <a:lnSpc>
-                <a:spcPts val="1754"/>
+                <a:spcPts val="1657"/>
               </a:lnSpc>
               <a:spcBef>
                 <a:spcPts val="0"/>
@@ -5956,7 +5956,7 @@
               </a:spcAft>
             </a:pPr>
             <a:r>
-              <a:rPr sz="1350" b="0" i="0">
+              <a:rPr sz="1275" b="0" i="0">
                 <a:solidFill>
                   <a:srgbClr val="1A2430"/>
                 </a:solidFill>
@@ -5975,7 +5975,7 @@
         </p:nvSpPr>
         <p:spPr>
           <a:xfrm>
-            <a:off x="609600" y="5231130"/>
+            <a:off x="609600" y="5214080"/>
             <a:ext cx="10972800" cy="504825"/>
           </a:xfrm>
           <a:prstGeom prst="roundRect">
@@ -6047,8 +6047,8 @@
         </p:nvSpPr>
         <p:spPr>
           <a:xfrm>
-            <a:off x="609600" y="6448425"/>
-            <a:ext cx="10972800" cy="219075"/>
+            <a:off x="609600" y="6467475"/>
+            <a:ext cx="10972800" cy="200025"/>
           </a:xfrm>
           <a:prstGeom prst="rect">
             <a:avLst/>
@@ -6089,7 +6089,7 @@
         </p:nvSpPr>
         <p:spPr>
           <a:xfrm>
-            <a:off x="609600" y="6448425"/>
+            <a:off x="609600" y="6467475"/>
             <a:ext cx="10972800" cy="9525"/>
           </a:xfrm>
           <a:prstGeom prst="rect">
@@ -6133,8 +6133,8 @@
         </p:nvSpPr>
         <p:spPr>
           <a:xfrm>
-            <a:off x="609600" y="6534150"/>
-            <a:ext cx="1575625" cy="133350"/>
+            <a:off x="609600" y="6553200"/>
+            <a:ext cx="1512379" cy="114300"/>
           </a:xfrm>
           <a:prstGeom prst="rect">
             <a:avLst/>
@@ -6156,7 +6156,7 @@
               </a:spcAft>
             </a:pPr>
             <a:r>
-              <a:rPr sz="900" b="0" i="0">
+              <a:rPr sz="862" b="0" i="0">
                 <a:solidFill>
                   <a:srgbClr val="5D6B79"/>
                 </a:solidFill>
@@ -6175,8 +6175,8 @@
         </p:nvSpPr>
         <p:spPr>
           <a:xfrm>
-            <a:off x="2270950" y="6534150"/>
-            <a:ext cx="7866316" cy="133350"/>
+            <a:off x="2207704" y="6553200"/>
+            <a:ext cx="7976616" cy="114300"/>
           </a:xfrm>
           <a:prstGeom prst="rect">
             <a:avLst/>
@@ -6198,7 +6198,7 @@
               </a:spcAft>
             </a:pPr>
             <a:r>
-              <a:rPr sz="900" b="0" i="0">
+              <a:rPr sz="862" b="0" i="0">
                 <a:solidFill>
                   <a:srgbClr val="5D6B79"/>
                 </a:solidFill>
@@ -6217,8 +6217,8 @@
         </p:nvSpPr>
         <p:spPr>
           <a:xfrm>
-            <a:off x="10280142" y="6534150"/>
-            <a:ext cx="1035367" cy="133350"/>
+            <a:off x="10327195" y="6553200"/>
+            <a:ext cx="994791" cy="114300"/>
           </a:xfrm>
           <a:prstGeom prst="rect">
             <a:avLst/>
@@ -6240,7 +6240,7 @@
               </a:spcAft>
             </a:pPr>
             <a:r>
-              <a:rPr sz="900" b="0" i="0">
+              <a:rPr sz="862" b="0" i="0">
                 <a:solidFill>
                   <a:srgbClr val="5D6B79"/>
                 </a:solidFill>
@@ -6259,8 +6259,8 @@
         </p:nvSpPr>
         <p:spPr>
           <a:xfrm>
-            <a:off x="11429809" y="6534150"/>
-            <a:ext cx="209740" cy="133350"/>
+            <a:off x="11436286" y="6553200"/>
+            <a:ext cx="203263" cy="114300"/>
           </a:xfrm>
           <a:prstGeom prst="rect">
             <a:avLst/>
@@ -6282,7 +6282,7 @@
               </a:spcAft>
             </a:pPr>
             <a:r>
-              <a:rPr sz="900" b="0" i="0">
+              <a:rPr sz="862" b="0" i="0">
                 <a:solidFill>
                   <a:srgbClr val="5D6B79"/>
                 </a:solidFill>
@@ -6517,12 +6517,12 @@
         </p:nvSpPr>
         <p:spPr>
           <a:xfrm>
-            <a:off x="609600" y="2285714"/>
-            <a:ext cx="10972800" cy="2068734"/>
+            <a:off x="609600" y="2298192"/>
+            <a:ext cx="10972800" cy="2043684"/>
           </a:xfrm>
           <a:prstGeom prst="roundRect">
             <a:avLst>
-              <a:gd name="adj" fmla="val 4604"/>
+              <a:gd name="adj" fmla="val 4660"/>
             </a:avLst>
           </a:prstGeom>
           <a:noFill/>
@@ -6563,8 +6563,8 @@
         </p:nvSpPr>
         <p:spPr>
           <a:xfrm>
-            <a:off x="809625" y="2219039"/>
-            <a:ext cx="3757612" cy="114300"/>
+            <a:off x="809625" y="2231517"/>
+            <a:ext cx="3920585" cy="114300"/>
           </a:xfrm>
           <a:prstGeom prst="rect">
             <a:avLst/>
@@ -6606,7 +6606,7 @@
               </a:spcAft>
             </a:pPr>
             <a:r>
-              <a:rPr sz="825" b="1" i="0" spc="82">
+              <a:rPr sz="862" b="1" i="0" spc="86">
                 <a:solidFill>
                   <a:srgbClr val="5F1937"/>
                 </a:solidFill>
@@ -6625,12 +6625,12 @@
         </p:nvSpPr>
         <p:spPr>
           <a:xfrm>
-            <a:off x="847725" y="2552414"/>
+            <a:off x="847725" y="2564891"/>
             <a:ext cx="10496550" cy="247650"/>
           </a:xfrm>
           <a:prstGeom prst="roundRect">
             <a:avLst>
-              <a:gd name="adj" fmla="val 19230"/>
+              <a:gd name="adj" fmla="val 15384"/>
             </a:avLst>
           </a:prstGeom>
           <a:solidFill>
@@ -6671,7 +6671,7 @@
         </p:nvSpPr>
         <p:spPr>
           <a:xfrm>
-            <a:off x="933450" y="2619089"/>
+            <a:off x="933450" y="2631566"/>
             <a:ext cx="1314450" cy="114300"/>
           </a:xfrm>
           <a:prstGeom prst="rect">
@@ -6713,7 +6713,7 @@
         </p:nvSpPr>
         <p:spPr>
           <a:xfrm>
-            <a:off x="2362200" y="2619089"/>
+            <a:off x="2362200" y="2631566"/>
             <a:ext cx="3877532" cy="114300"/>
           </a:xfrm>
           <a:prstGeom prst="rect">
@@ -6755,7 +6755,7 @@
         </p:nvSpPr>
         <p:spPr>
           <a:xfrm>
-            <a:off x="6354032" y="2619089"/>
+            <a:off x="6354032" y="2631566"/>
             <a:ext cx="3837717" cy="114300"/>
           </a:xfrm>
           <a:prstGeom prst="rect">
@@ -6797,7 +6797,7 @@
         </p:nvSpPr>
         <p:spPr>
           <a:xfrm>
-            <a:off x="10306050" y="2619089"/>
+            <a:off x="10306050" y="2631566"/>
             <a:ext cx="1009650" cy="114300"/>
           </a:xfrm>
           <a:prstGeom prst="rect">
@@ -6839,8 +6839,8 @@
         </p:nvSpPr>
         <p:spPr>
           <a:xfrm>
-            <a:off x="847725" y="2800064"/>
-            <a:ext cx="10496550" cy="333851"/>
+            <a:off x="847725" y="2812541"/>
+            <a:ext cx="10496550" cy="327564"/>
           </a:xfrm>
           <a:prstGeom prst="rect">
             <a:avLst/>
@@ -6883,7 +6883,7 @@
         </p:nvSpPr>
         <p:spPr>
           <a:xfrm>
-            <a:off x="847725" y="3124390"/>
+            <a:off x="847725" y="3130581"/>
             <a:ext cx="10496550" cy="9525"/>
           </a:xfrm>
           <a:prstGeom prst="rect">
@@ -6927,8 +6927,8 @@
         </p:nvSpPr>
         <p:spPr>
           <a:xfrm>
-            <a:off x="933450" y="2852451"/>
-            <a:ext cx="1314450" cy="229076"/>
+            <a:off x="933450" y="2864929"/>
+            <a:ext cx="1314450" cy="222789"/>
           </a:xfrm>
           <a:prstGeom prst="rect">
             <a:avLst/>
@@ -6972,8 +6972,8 @@
         </p:nvSpPr>
         <p:spPr>
           <a:xfrm>
-            <a:off x="2362200" y="2852451"/>
-            <a:ext cx="3877532" cy="229076"/>
+            <a:off x="2362200" y="2864929"/>
+            <a:ext cx="3877532" cy="222789"/>
           </a:xfrm>
           <a:prstGeom prst="rect">
             <a:avLst/>
@@ -7017,8 +7017,8 @@
         </p:nvSpPr>
         <p:spPr>
           <a:xfrm>
-            <a:off x="6354032" y="2852451"/>
-            <a:ext cx="3837717" cy="229076"/>
+            <a:off x="6354032" y="2864929"/>
+            <a:ext cx="3837717" cy="222789"/>
           </a:xfrm>
           <a:prstGeom prst="rect">
             <a:avLst/>
@@ -7062,8 +7062,8 @@
         </p:nvSpPr>
         <p:spPr>
           <a:xfrm>
-            <a:off x="10306050" y="2852451"/>
-            <a:ext cx="907256" cy="224313"/>
+            <a:off x="10306050" y="2864929"/>
+            <a:ext cx="882110" cy="218027"/>
           </a:xfrm>
           <a:prstGeom prst="roundRect">
             <a:avLst>
@@ -7100,7 +7100,7 @@
           <a:p>
             <a:pPr algn="l">
               <a:lnSpc>
-                <a:spcPts val="1316"/>
+                <a:spcPts val="1267"/>
               </a:lnSpc>
               <a:spcBef>
                 <a:spcPts val="0"/>
@@ -7110,7 +7110,7 @@
               </a:spcAft>
             </a:pPr>
             <a:r>
-              <a:rPr sz="1012" b="1" i="0">
+              <a:rPr sz="975" b="1" i="0">
                 <a:solidFill>
                   <a:srgbClr val="FFFFFF"/>
                 </a:solidFill>
@@ -7129,8 +7129,8 @@
         </p:nvSpPr>
         <p:spPr>
           <a:xfrm>
-            <a:off x="847725" y="3133915"/>
-            <a:ext cx="10496550" cy="338613"/>
+            <a:off x="847725" y="3140106"/>
+            <a:ext cx="10496550" cy="332327"/>
           </a:xfrm>
           <a:prstGeom prst="rect">
             <a:avLst/>
@@ -7171,7 +7171,7 @@
         </p:nvSpPr>
         <p:spPr>
           <a:xfrm>
-            <a:off x="847725" y="3463004"/>
+            <a:off x="847725" y="3462909"/>
             <a:ext cx="10496550" cy="9525"/>
           </a:xfrm>
           <a:prstGeom prst="rect">
@@ -7215,8 +7215,8 @@
         </p:nvSpPr>
         <p:spPr>
           <a:xfrm>
-            <a:off x="933450" y="3191065"/>
-            <a:ext cx="1314450" cy="233838"/>
+            <a:off x="933450" y="3197256"/>
+            <a:ext cx="1314450" cy="227552"/>
           </a:xfrm>
           <a:prstGeom prst="rect">
             <a:avLst/>
@@ -7260,8 +7260,8 @@
         </p:nvSpPr>
         <p:spPr>
           <a:xfrm>
-            <a:off x="2362200" y="3191065"/>
-            <a:ext cx="3877532" cy="233838"/>
+            <a:off x="2362200" y="3197256"/>
+            <a:ext cx="3877532" cy="227552"/>
           </a:xfrm>
           <a:prstGeom prst="rect">
             <a:avLst/>
@@ -7305,8 +7305,8 @@
         </p:nvSpPr>
         <p:spPr>
           <a:xfrm>
-            <a:off x="6354032" y="3191065"/>
-            <a:ext cx="3837717" cy="233838"/>
+            <a:off x="6354032" y="3197256"/>
+            <a:ext cx="3837717" cy="227552"/>
           </a:xfrm>
           <a:prstGeom prst="rect">
             <a:avLst/>
@@ -7350,13 +7350,848 @@
         </p:nvSpPr>
         <p:spPr>
           <a:xfrm>
-            <a:off x="10306050" y="3191065"/>
-            <a:ext cx="899922" cy="224313"/>
+            <a:off x="10306050" y="3197256"/>
+            <a:ext cx="875157" cy="218027"/>
           </a:xfrm>
           <a:prstGeom prst="roundRect">
             <a:avLst>
               <a:gd name="adj" fmla="val 50000"/>
             </a:avLst>
+          </a:prstGeom>
+          <a:solidFill>
+            <a:srgbClr val="8C5F1B"/>
+          </a:solidFill>
+          <a:ln>
+            <a:noFill/>
+          </a:ln>
+          <a:effectLst/>
+        </p:spPr>
+        <p:style>
+          <a:lnRef idx="1">
+            <a:schemeClr val="accent1"/>
+          </a:lnRef>
+          <a:fillRef idx="3">
+            <a:schemeClr val="accent1"/>
+          </a:fillRef>
+          <a:effectRef idx="2">
+            <a:schemeClr val="accent1"/>
+          </a:effectRef>
+          <a:fontRef idx="minor">
+            <a:schemeClr val="lt1"/>
+          </a:fontRef>
+        </p:style>
+        <p:txBody>
+          <a:bodyPr rtlCol="0" anchor="ctr" wrap="none" lIns="114300" tIns="28575" rIns="114300" bIns="28575">
+            <a:noAutofit/>
+          </a:bodyPr>
+          <a:lstStyle/>
+          <a:p>
+            <a:pPr algn="l">
+              <a:lnSpc>
+                <a:spcPts val="1267"/>
+              </a:lnSpc>
+              <a:spcBef>
+                <a:spcPts val="0"/>
+              </a:spcBef>
+              <a:spcAft>
+                <a:spcPts val="0"/>
+              </a:spcAft>
+            </a:pPr>
+            <a:r>
+              <a:rPr sz="975" b="1" i="0">
+                <a:solidFill>
+                  <a:srgbClr val="FFFFFF"/>
+                </a:solidFill>
+                <a:latin typeface="Arial"/>
+              </a:rPr>
+              <a:t>Option two</a:t>
+            </a:r>
+          </a:p>
+        </p:txBody>
+      </p:sp>
+      <p:sp>
+        <p:nvSpPr>
+          <p:cNvPr id="25" name="Rectangle 24"/>
+          <p:cNvSpPr/>
+          <p:nvPr/>
+        </p:nvSpPr>
+        <p:spPr>
+          <a:xfrm>
+            <a:off x="847725" y="3472434"/>
+            <a:ext cx="10496550" cy="332327"/>
+          </a:xfrm>
+          <a:prstGeom prst="rect">
+            <a:avLst/>
+          </a:prstGeom>
+          <a:solidFill>
+            <a:srgbClr val="F3F6F9"/>
+          </a:solidFill>
+          <a:ln>
+            <a:noFill/>
+          </a:ln>
+          <a:effectLst/>
+        </p:spPr>
+        <p:style>
+          <a:lnRef idx="1">
+            <a:schemeClr val="accent1"/>
+          </a:lnRef>
+          <a:fillRef idx="3">
+            <a:schemeClr val="accent1"/>
+          </a:fillRef>
+          <a:effectRef idx="2">
+            <a:schemeClr val="accent1"/>
+          </a:effectRef>
+          <a:fontRef idx="minor">
+            <a:schemeClr val="lt1"/>
+          </a:fontRef>
+        </p:style>
+        <p:txBody>
+          <a:bodyPr rtlCol="0" anchor="ctr"/>
+          <a:lstStyle/>
+          <a:p>
+            <a:pPr algn="ctr"/>
+          </a:p>
+        </p:txBody>
+      </p:sp>
+      <p:sp>
+        <p:nvSpPr>
+          <p:cNvPr id="26" name="Rectangle 25"/>
+          <p:cNvSpPr/>
+          <p:nvPr/>
+        </p:nvSpPr>
+        <p:spPr>
+          <a:xfrm>
+            <a:off x="847725" y="3795236"/>
+            <a:ext cx="10496550" cy="9525"/>
+          </a:xfrm>
+          <a:prstGeom prst="rect">
+            <a:avLst/>
+          </a:prstGeom>
+          <a:solidFill>
+            <a:srgbClr val="D9E0E7"/>
+          </a:solidFill>
+          <a:ln>
+            <a:noFill/>
+          </a:ln>
+          <a:effectLst/>
+        </p:spPr>
+        <p:style>
+          <a:lnRef idx="1">
+            <a:schemeClr val="accent1"/>
+          </a:lnRef>
+          <a:fillRef idx="3">
+            <a:schemeClr val="accent1"/>
+          </a:fillRef>
+          <a:effectRef idx="2">
+            <a:schemeClr val="accent1"/>
+          </a:effectRef>
+          <a:fontRef idx="minor">
+            <a:schemeClr val="lt1"/>
+          </a:fontRef>
+        </p:style>
+        <p:txBody>
+          <a:bodyPr rtlCol="0" anchor="ctr"/>
+          <a:lstStyle/>
+          <a:p>
+            <a:pPr algn="ctr"/>
+          </a:p>
+        </p:txBody>
+      </p:sp>
+      <p:sp>
+        <p:nvSpPr>
+          <p:cNvPr id="27" name="TextBox 26"/>
+          <p:cNvSpPr txBox="1"/>
+          <p:nvPr/>
+        </p:nvSpPr>
+        <p:spPr>
+          <a:xfrm>
+            <a:off x="933450" y="3529584"/>
+            <a:ext cx="1314450" cy="227552"/>
+          </a:xfrm>
+          <a:prstGeom prst="rect">
+            <a:avLst/>
+          </a:prstGeom>
+          <a:noFill/>
+        </p:spPr>
+        <p:txBody>
+          <a:bodyPr wrap="square" anchor="t" lIns="0" tIns="0" rIns="0" bIns="0">
+            <a:noAutofit/>
+          </a:bodyPr>
+          <a:lstStyle/>
+          <a:p>
+            <a:pPr algn="l">
+              <a:lnSpc>
+                <a:spcPts val="1267"/>
+              </a:lnSpc>
+              <a:spcBef>
+                <a:spcPts val="0"/>
+              </a:spcBef>
+              <a:spcAft>
+                <a:spcPts val="0"/>
+              </a:spcAft>
+            </a:pPr>
+            <a:r>
+              <a:rPr sz="975" b="1" i="0">
+                <a:solidFill>
+                  <a:srgbClr val="1A2430"/>
+                </a:solidFill>
+                <a:latin typeface="Arial"/>
+              </a:rPr>
+              <a:t>Third criterion</a:t>
+            </a:r>
+          </a:p>
+        </p:txBody>
+      </p:sp>
+      <p:sp>
+        <p:nvSpPr>
+          <p:cNvPr id="28" name="TextBox 27"/>
+          <p:cNvSpPr txBox="1"/>
+          <p:nvPr/>
+        </p:nvSpPr>
+        <p:spPr>
+          <a:xfrm>
+            <a:off x="2362200" y="3529584"/>
+            <a:ext cx="3877532" cy="227552"/>
+          </a:xfrm>
+          <a:prstGeom prst="rect">
+            <a:avLst/>
+          </a:prstGeom>
+          <a:noFill/>
+        </p:spPr>
+        <p:txBody>
+          <a:bodyPr wrap="square" anchor="t" lIns="0" tIns="0" rIns="0" bIns="0">
+            <a:noAutofit/>
+          </a:bodyPr>
+          <a:lstStyle/>
+          <a:p>
+            <a:pPr algn="l">
+              <a:lnSpc>
+                <a:spcPts val="1267"/>
+              </a:lnSpc>
+              <a:spcBef>
+                <a:spcPts val="0"/>
+              </a:spcBef>
+              <a:spcAft>
+                <a:spcPts val="0"/>
+              </a:spcAft>
+            </a:pPr>
+            <a:r>
+              <a:rPr sz="975" b="0" i="0">
+                <a:solidFill>
+                  <a:srgbClr val="1A2430"/>
+                </a:solidFill>
+                <a:latin typeface="Arial"/>
+              </a:rPr>
+              <a:t>What option one does</a:t>
+            </a:r>
+          </a:p>
+        </p:txBody>
+      </p:sp>
+      <p:sp>
+        <p:nvSpPr>
+          <p:cNvPr id="29" name="TextBox 28"/>
+          <p:cNvSpPr txBox="1"/>
+          <p:nvPr/>
+        </p:nvSpPr>
+        <p:spPr>
+          <a:xfrm>
+            <a:off x="6354032" y="3529584"/>
+            <a:ext cx="3837717" cy="227552"/>
+          </a:xfrm>
+          <a:prstGeom prst="rect">
+            <a:avLst/>
+          </a:prstGeom>
+          <a:noFill/>
+        </p:spPr>
+        <p:txBody>
+          <a:bodyPr wrap="square" anchor="t" lIns="0" tIns="0" rIns="0" bIns="0">
+            <a:noAutofit/>
+          </a:bodyPr>
+          <a:lstStyle/>
+          <a:p>
+            <a:pPr algn="l">
+              <a:lnSpc>
+                <a:spcPts val="1267"/>
+              </a:lnSpc>
+              <a:spcBef>
+                <a:spcPts val="0"/>
+              </a:spcBef>
+              <a:spcAft>
+                <a:spcPts val="0"/>
+              </a:spcAft>
+            </a:pPr>
+            <a:r>
+              <a:rPr sz="975" b="0" i="0">
+                <a:solidFill>
+                  <a:srgbClr val="1A2430"/>
+                </a:solidFill>
+                <a:latin typeface="Arial"/>
+              </a:rPr>
+              <a:t>What option two does</a:t>
+            </a:r>
+          </a:p>
+        </p:txBody>
+      </p:sp>
+      <p:sp>
+        <p:nvSpPr>
+          <p:cNvPr id="30" name="Rounded Rectangle 29"/>
+          <p:cNvSpPr/>
+          <p:nvPr/>
+        </p:nvSpPr>
+        <p:spPr>
+          <a:xfrm>
+            <a:off x="10306050" y="3529584"/>
+            <a:ext cx="882110" cy="218027"/>
+          </a:xfrm>
+          <a:prstGeom prst="roundRect">
+            <a:avLst>
+              <a:gd name="adj" fmla="val 50000"/>
+            </a:avLst>
+          </a:prstGeom>
+          <a:solidFill>
+            <a:srgbClr val="5F1937"/>
+          </a:solidFill>
+          <a:ln>
+            <a:noFill/>
+          </a:ln>
+          <a:effectLst/>
+        </p:spPr>
+        <p:style>
+          <a:lnRef idx="1">
+            <a:schemeClr val="accent1"/>
+          </a:lnRef>
+          <a:fillRef idx="3">
+            <a:schemeClr val="accent1"/>
+          </a:fillRef>
+          <a:effectRef idx="2">
+            <a:schemeClr val="accent1"/>
+          </a:effectRef>
+          <a:fontRef idx="minor">
+            <a:schemeClr val="lt1"/>
+          </a:fontRef>
+        </p:style>
+        <p:txBody>
+          <a:bodyPr rtlCol="0" anchor="ctr" wrap="none" lIns="114300" tIns="28575" rIns="114300" bIns="28575">
+            <a:noAutofit/>
+          </a:bodyPr>
+          <a:lstStyle/>
+          <a:p>
+            <a:pPr algn="l">
+              <a:lnSpc>
+                <a:spcPts val="1267"/>
+              </a:lnSpc>
+              <a:spcBef>
+                <a:spcPts val="0"/>
+              </a:spcBef>
+              <a:spcAft>
+                <a:spcPts val="0"/>
+              </a:spcAft>
+            </a:pPr>
+            <a:r>
+              <a:rPr sz="975" b="1" i="0">
+                <a:solidFill>
+                  <a:srgbClr val="FFFFFF"/>
+                </a:solidFill>
+                <a:latin typeface="Arial"/>
+              </a:rPr>
+              <a:t>Option one</a:t>
+            </a:r>
+          </a:p>
+        </p:txBody>
+      </p:sp>
+      <p:sp>
+        <p:nvSpPr>
+          <p:cNvPr id="31" name="Rectangle 30"/>
+          <p:cNvSpPr/>
+          <p:nvPr/>
+        </p:nvSpPr>
+        <p:spPr>
+          <a:xfrm>
+            <a:off x="847725" y="3804761"/>
+            <a:ext cx="10496550" cy="332327"/>
+          </a:xfrm>
+          <a:prstGeom prst="rect">
+            <a:avLst/>
+          </a:prstGeom>
+          <a:noFill/>
+          <a:ln>
+            <a:noFill/>
+          </a:ln>
+          <a:effectLst/>
+        </p:spPr>
+        <p:style>
+          <a:lnRef idx="1">
+            <a:schemeClr val="accent1"/>
+          </a:lnRef>
+          <a:fillRef idx="3">
+            <a:schemeClr val="accent1"/>
+          </a:fillRef>
+          <a:effectRef idx="2">
+            <a:schemeClr val="accent1"/>
+          </a:effectRef>
+          <a:fontRef idx="minor">
+            <a:schemeClr val="lt1"/>
+          </a:fontRef>
+        </p:style>
+        <p:txBody>
+          <a:bodyPr rtlCol="0" anchor="ctr"/>
+          <a:lstStyle/>
+          <a:p>
+            <a:pPr algn="ctr"/>
+          </a:p>
+        </p:txBody>
+      </p:sp>
+      <p:sp>
+        <p:nvSpPr>
+          <p:cNvPr id="32" name="Rectangle 31"/>
+          <p:cNvSpPr/>
+          <p:nvPr/>
+        </p:nvSpPr>
+        <p:spPr>
+          <a:xfrm>
+            <a:off x="847725" y="4127563"/>
+            <a:ext cx="10496550" cy="9525"/>
+          </a:xfrm>
+          <a:prstGeom prst="rect">
+            <a:avLst/>
+          </a:prstGeom>
+          <a:solidFill>
+            <a:srgbClr val="D9E0E7"/>
+          </a:solidFill>
+          <a:ln>
+            <a:noFill/>
+          </a:ln>
+          <a:effectLst/>
+        </p:spPr>
+        <p:style>
+          <a:lnRef idx="1">
+            <a:schemeClr val="accent1"/>
+          </a:lnRef>
+          <a:fillRef idx="3">
+            <a:schemeClr val="accent1"/>
+          </a:fillRef>
+          <a:effectRef idx="2">
+            <a:schemeClr val="accent1"/>
+          </a:effectRef>
+          <a:fontRef idx="minor">
+            <a:schemeClr val="lt1"/>
+          </a:fontRef>
+        </p:style>
+        <p:txBody>
+          <a:bodyPr rtlCol="0" anchor="ctr"/>
+          <a:lstStyle/>
+          <a:p>
+            <a:pPr algn="ctr"/>
+          </a:p>
+        </p:txBody>
+      </p:sp>
+      <p:sp>
+        <p:nvSpPr>
+          <p:cNvPr id="33" name="TextBox 32"/>
+          <p:cNvSpPr txBox="1"/>
+          <p:nvPr/>
+        </p:nvSpPr>
+        <p:spPr>
+          <a:xfrm>
+            <a:off x="933450" y="3861911"/>
+            <a:ext cx="1314450" cy="227552"/>
+          </a:xfrm>
+          <a:prstGeom prst="rect">
+            <a:avLst/>
+          </a:prstGeom>
+          <a:noFill/>
+        </p:spPr>
+        <p:txBody>
+          <a:bodyPr wrap="square" anchor="t" lIns="0" tIns="0" rIns="0" bIns="0">
+            <a:noAutofit/>
+          </a:bodyPr>
+          <a:lstStyle/>
+          <a:p>
+            <a:pPr algn="l">
+              <a:lnSpc>
+                <a:spcPts val="1267"/>
+              </a:lnSpc>
+              <a:spcBef>
+                <a:spcPts val="0"/>
+              </a:spcBef>
+              <a:spcAft>
+                <a:spcPts val="0"/>
+              </a:spcAft>
+            </a:pPr>
+            <a:r>
+              <a:rPr sz="975" b="1" i="0">
+                <a:solidFill>
+                  <a:srgbClr val="1A2430"/>
+                </a:solidFill>
+                <a:latin typeface="Arial"/>
+              </a:rPr>
+              <a:t>Fourth criterion</a:t>
+            </a:r>
+          </a:p>
+        </p:txBody>
+      </p:sp>
+      <p:sp>
+        <p:nvSpPr>
+          <p:cNvPr id="34" name="TextBox 33"/>
+          <p:cNvSpPr txBox="1"/>
+          <p:nvPr/>
+        </p:nvSpPr>
+        <p:spPr>
+          <a:xfrm>
+            <a:off x="2362200" y="3861911"/>
+            <a:ext cx="3877532" cy="227552"/>
+          </a:xfrm>
+          <a:prstGeom prst="rect">
+            <a:avLst/>
+          </a:prstGeom>
+          <a:noFill/>
+        </p:spPr>
+        <p:txBody>
+          <a:bodyPr wrap="square" anchor="t" lIns="0" tIns="0" rIns="0" bIns="0">
+            <a:noAutofit/>
+          </a:bodyPr>
+          <a:lstStyle/>
+          <a:p>
+            <a:pPr algn="l">
+              <a:lnSpc>
+                <a:spcPts val="1267"/>
+              </a:lnSpc>
+              <a:spcBef>
+                <a:spcPts val="0"/>
+              </a:spcBef>
+              <a:spcAft>
+                <a:spcPts val="0"/>
+              </a:spcAft>
+            </a:pPr>
+            <a:r>
+              <a:rPr sz="975" b="0" i="0">
+                <a:solidFill>
+                  <a:srgbClr val="1A2430"/>
+                </a:solidFill>
+                <a:latin typeface="Arial"/>
+              </a:rPr>
+              <a:t>What option one does</a:t>
+            </a:r>
+          </a:p>
+        </p:txBody>
+      </p:sp>
+      <p:sp>
+        <p:nvSpPr>
+          <p:cNvPr id="35" name="TextBox 34"/>
+          <p:cNvSpPr txBox="1"/>
+          <p:nvPr/>
+        </p:nvSpPr>
+        <p:spPr>
+          <a:xfrm>
+            <a:off x="6354032" y="3861911"/>
+            <a:ext cx="3837717" cy="227552"/>
+          </a:xfrm>
+          <a:prstGeom prst="rect">
+            <a:avLst/>
+          </a:prstGeom>
+          <a:noFill/>
+        </p:spPr>
+        <p:txBody>
+          <a:bodyPr wrap="square" anchor="t" lIns="0" tIns="0" rIns="0" bIns="0">
+            <a:noAutofit/>
+          </a:bodyPr>
+          <a:lstStyle/>
+          <a:p>
+            <a:pPr algn="l">
+              <a:lnSpc>
+                <a:spcPts val="1267"/>
+              </a:lnSpc>
+              <a:spcBef>
+                <a:spcPts val="0"/>
+              </a:spcBef>
+              <a:spcAft>
+                <a:spcPts val="0"/>
+              </a:spcAft>
+            </a:pPr>
+            <a:r>
+              <a:rPr sz="975" b="0" i="0">
+                <a:solidFill>
+                  <a:srgbClr val="1A2430"/>
+                </a:solidFill>
+                <a:latin typeface="Arial"/>
+              </a:rPr>
+              <a:t>What option two does</a:t>
+            </a:r>
+          </a:p>
+        </p:txBody>
+      </p:sp>
+      <p:sp>
+        <p:nvSpPr>
+          <p:cNvPr id="36" name="Rounded Rectangle 35"/>
+          <p:cNvSpPr/>
+          <p:nvPr/>
+        </p:nvSpPr>
+        <p:spPr>
+          <a:xfrm>
+            <a:off x="10306050" y="3861911"/>
+            <a:ext cx="655320" cy="218027"/>
+          </a:xfrm>
+          <a:prstGeom prst="roundRect">
+            <a:avLst>
+              <a:gd name="adj" fmla="val 50000"/>
+            </a:avLst>
+          </a:prstGeom>
+          <a:solidFill>
+            <a:srgbClr val="EEDCE4"/>
+          </a:solidFill>
+          <a:ln>
+            <a:noFill/>
+          </a:ln>
+          <a:effectLst/>
+        </p:spPr>
+        <p:style>
+          <a:lnRef idx="1">
+            <a:schemeClr val="accent1"/>
+          </a:lnRef>
+          <a:fillRef idx="3">
+            <a:schemeClr val="accent1"/>
+          </a:fillRef>
+          <a:effectRef idx="2">
+            <a:schemeClr val="accent1"/>
+          </a:effectRef>
+          <a:fontRef idx="minor">
+            <a:schemeClr val="lt1"/>
+          </a:fontRef>
+        </p:style>
+        <p:txBody>
+          <a:bodyPr rtlCol="0" anchor="ctr" wrap="none" lIns="114300" tIns="28575" rIns="114300" bIns="28575">
+            <a:noAutofit/>
+          </a:bodyPr>
+          <a:lstStyle/>
+          <a:p>
+            <a:pPr algn="l">
+              <a:lnSpc>
+                <a:spcPts val="1267"/>
+              </a:lnSpc>
+              <a:spcBef>
+                <a:spcPts val="0"/>
+              </a:spcBef>
+              <a:spcAft>
+                <a:spcPts val="0"/>
+              </a:spcAft>
+            </a:pPr>
+            <a:r>
+              <a:rPr sz="975" b="1" i="0">
+                <a:solidFill>
+                  <a:srgbClr val="431127"/>
+                </a:solidFill>
+                <a:latin typeface="Arial"/>
+              </a:rPr>
+              <a:t>Neither</a:t>
+            </a:r>
+          </a:p>
+        </p:txBody>
+      </p:sp>
+      <p:sp>
+        <p:nvSpPr>
+          <p:cNvPr id="37" name="Rectangle 36"/>
+          <p:cNvSpPr/>
+          <p:nvPr/>
+        </p:nvSpPr>
+        <p:spPr>
+          <a:xfrm>
+            <a:off x="609600" y="4494276"/>
+            <a:ext cx="5410200" cy="615219"/>
+          </a:xfrm>
+          <a:prstGeom prst="rect">
+            <a:avLst/>
+          </a:prstGeom>
+          <a:solidFill>
+            <a:srgbClr val="F8F1F4"/>
+          </a:solidFill>
+          <a:ln>
+            <a:noFill/>
+          </a:ln>
+          <a:effectLst/>
+        </p:spPr>
+        <p:style>
+          <a:lnRef idx="1">
+            <a:schemeClr val="accent1"/>
+          </a:lnRef>
+          <a:fillRef idx="3">
+            <a:schemeClr val="accent1"/>
+          </a:fillRef>
+          <a:effectRef idx="2">
+            <a:schemeClr val="accent1"/>
+          </a:effectRef>
+          <a:fontRef idx="minor">
+            <a:schemeClr val="lt1"/>
+          </a:fontRef>
+        </p:style>
+        <p:txBody>
+          <a:bodyPr rtlCol="0" anchor="t" wrap="none" lIns="171450" tIns="114300" rIns="171450" bIns="114300">
+            <a:noAutofit/>
+          </a:bodyPr>
+          <a:lstStyle/>
+          <a:p>
+            <a:pPr algn="l">
+              <a:lnSpc>
+                <a:spcPts val="1522"/>
+              </a:lnSpc>
+              <a:spcBef>
+                <a:spcPts val="0"/>
+              </a:spcBef>
+              <a:spcAft>
+                <a:spcPts val="0"/>
+              </a:spcAft>
+            </a:pPr>
+            <a:r>
+              <a:rPr sz="1087" b="1" i="0">
+                <a:solidFill>
+                  <a:srgbClr val="431127"/>
+                </a:solidFill>
+                <a:latin typeface="Arial"/>
+              </a:rPr>
+              <a:t>A neutral note:</a:t>
+            </a:r>
+            <a:r>
+              <a:rPr sz="1087" b="0" i="0">
+                <a:solidFill>
+                  <a:srgbClr val="1A2430"/>
+                </a:solidFill>
+                <a:latin typeface="Arial"/>
+              </a:rPr>
+              <a:t> the blue strip carries a qualification that supports the argument.</a:t>
+            </a:r>
+          </a:p>
+        </p:txBody>
+      </p:sp>
+      <p:sp>
+        <p:nvSpPr>
+          <p:cNvPr id="38" name="Rectangle 37"/>
+          <p:cNvSpPr/>
+          <p:nvPr/>
+        </p:nvSpPr>
+        <p:spPr>
+          <a:xfrm>
+            <a:off x="609600" y="4494276"/>
+            <a:ext cx="47625" cy="615219"/>
+          </a:xfrm>
+          <a:prstGeom prst="rect">
+            <a:avLst/>
+          </a:prstGeom>
+          <a:solidFill>
+            <a:srgbClr val="5F1937"/>
+          </a:solidFill>
+          <a:ln>
+            <a:noFill/>
+          </a:ln>
+          <a:effectLst/>
+        </p:spPr>
+        <p:style>
+          <a:lnRef idx="1">
+            <a:schemeClr val="accent1"/>
+          </a:lnRef>
+          <a:fillRef idx="3">
+            <a:schemeClr val="accent1"/>
+          </a:fillRef>
+          <a:effectRef idx="2">
+            <a:schemeClr val="accent1"/>
+          </a:effectRef>
+          <a:fontRef idx="minor">
+            <a:schemeClr val="lt1"/>
+          </a:fontRef>
+        </p:style>
+        <p:txBody>
+          <a:bodyPr rtlCol="0" anchor="ctr"/>
+          <a:lstStyle/>
+          <a:p>
+            <a:pPr algn="ctr"/>
+          </a:p>
+        </p:txBody>
+      </p:sp>
+      <p:sp>
+        <p:nvSpPr>
+          <p:cNvPr id="39" name="Rectangle 38"/>
+          <p:cNvSpPr/>
+          <p:nvPr/>
+        </p:nvSpPr>
+        <p:spPr>
+          <a:xfrm>
+            <a:off x="6172200" y="4494276"/>
+            <a:ext cx="5410200" cy="615219"/>
+          </a:xfrm>
+          <a:prstGeom prst="rect">
+            <a:avLst/>
+          </a:prstGeom>
+          <a:solidFill>
+            <a:srgbClr val="FAF4EA"/>
+          </a:solidFill>
+          <a:ln>
+            <a:noFill/>
+          </a:ln>
+          <a:effectLst/>
+        </p:spPr>
+        <p:style>
+          <a:lnRef idx="1">
+            <a:schemeClr val="accent1"/>
+          </a:lnRef>
+          <a:fillRef idx="3">
+            <a:schemeClr val="accent1"/>
+          </a:fillRef>
+          <a:effectRef idx="2">
+            <a:schemeClr val="accent1"/>
+          </a:effectRef>
+          <a:fontRef idx="minor">
+            <a:schemeClr val="lt1"/>
+          </a:fontRef>
+        </p:style>
+        <p:txBody>
+          <a:bodyPr rtlCol="0" anchor="t" wrap="square" lIns="171450" tIns="114300" rIns="171450" bIns="114300">
+            <a:noAutofit/>
+          </a:bodyPr>
+          <a:lstStyle/>
+          <a:p>
+            <a:pPr algn="l">
+              <a:lnSpc>
+                <a:spcPts val="1522"/>
+              </a:lnSpc>
+              <a:spcBef>
+                <a:spcPts val="0"/>
+              </a:spcBef>
+              <a:spcAft>
+                <a:spcPts val="0"/>
+              </a:spcAft>
+            </a:pPr>
+            <a:r>
+              <a:rPr sz="1087" b="1" i="0">
+                <a:solidFill>
+                  <a:srgbClr val="431127"/>
+                </a:solidFill>
+                <a:latin typeface="Arial"/>
+              </a:rPr>
+              <a:t>A warning note:</a:t>
+            </a:r>
+            <a:r>
+              <a:rPr sz="1087" b="0" i="0">
+                <a:solidFill>
+                  <a:srgbClr val="1A2430"/>
+                </a:solidFill>
+                <a:latin typeface="Arial"/>
+              </a:rPr>
+              <a:t> the warm strip is reserved for a genuine caution, at most once per slide.</a:t>
+            </a:r>
+          </a:p>
+        </p:txBody>
+      </p:sp>
+      <p:sp>
+        <p:nvSpPr>
+          <p:cNvPr id="40" name="Rectangle 39"/>
+          <p:cNvSpPr/>
+          <p:nvPr/>
+        </p:nvSpPr>
+        <p:spPr>
+          <a:xfrm>
+            <a:off x="6172200" y="4494276"/>
+            <a:ext cx="47625" cy="615219"/>
+          </a:xfrm>
+          <a:prstGeom prst="rect">
+            <a:avLst/>
           </a:prstGeom>
           <a:solidFill>
             <a:srgbClr val="C08A2E"/>
@@ -7381,51 +8216,28 @@
           </a:fontRef>
         </p:style>
         <p:txBody>
-          <a:bodyPr rtlCol="0" anchor="ctr" wrap="none" lIns="114300" tIns="28575" rIns="114300" bIns="28575">
-            <a:noAutofit/>
-          </a:bodyPr>
-          <a:lstStyle/>
-          <a:p>
-            <a:pPr algn="l">
-              <a:lnSpc>
-                <a:spcPts val="1316"/>
-              </a:lnSpc>
-              <a:spcBef>
-                <a:spcPts val="0"/>
-              </a:spcBef>
-              <a:spcAft>
-                <a:spcPts val="0"/>
-              </a:spcAft>
-            </a:pPr>
-            <a:r>
-              <a:rPr sz="1012" b="1" i="0">
-                <a:solidFill>
-                  <a:srgbClr val="FFFFFF"/>
-                </a:solidFill>
-                <a:latin typeface="Arial"/>
-              </a:rPr>
-              <a:t>Option two</a:t>
-            </a:r>
-          </a:p>
-        </p:txBody>
-      </p:sp>
-      <p:sp>
-        <p:nvSpPr>
-          <p:cNvPr id="25" name="Rectangle 24"/>
+          <a:bodyPr rtlCol="0" anchor="ctr"/>
+          <a:lstStyle/>
+          <a:p>
+            <a:pPr algn="ctr"/>
+          </a:p>
+        </p:txBody>
+      </p:sp>
+      <p:sp>
+        <p:nvSpPr>
+          <p:cNvPr id="41" name="Rectangle 40"/>
           <p:cNvSpPr/>
           <p:nvPr/>
         </p:nvSpPr>
         <p:spPr>
           <a:xfrm>
-            <a:off x="847725" y="3472434"/>
-            <a:ext cx="10496550" cy="338613"/>
-          </a:xfrm>
-          <a:prstGeom prst="rect">
-            <a:avLst/>
-          </a:prstGeom>
-          <a:solidFill>
-            <a:srgbClr val="F3F6F9"/>
-          </a:solidFill>
+            <a:off x="609600" y="6467475"/>
+            <a:ext cx="10972800" cy="200025"/>
+          </a:xfrm>
+          <a:prstGeom prst="rect">
+            <a:avLst/>
+          </a:prstGeom>
+          <a:noFill/>
           <a:ln>
             <a:noFill/>
           </a:ln>
@@ -7455,14 +8267,14 @@
       </p:sp>
       <p:sp>
         <p:nvSpPr>
-          <p:cNvPr id="26" name="Rectangle 25"/>
+          <p:cNvPr id="42" name="Rectangle 41"/>
           <p:cNvSpPr/>
           <p:nvPr/>
         </p:nvSpPr>
         <p:spPr>
           <a:xfrm>
-            <a:off x="847725" y="3801522"/>
-            <a:ext cx="10496550" cy="9525"/>
+            <a:off x="609600" y="6467475"/>
+            <a:ext cx="10972800" cy="9525"/>
           </a:xfrm>
           <a:prstGeom prst="rect">
             <a:avLst/>
@@ -7499,14 +8311,14 @@
       </p:sp>
       <p:sp>
         <p:nvSpPr>
-          <p:cNvPr id="27" name="TextBox 26"/>
+          <p:cNvPr id="43" name="TextBox 42"/>
           <p:cNvSpPr txBox="1"/>
           <p:nvPr/>
         </p:nvSpPr>
         <p:spPr>
           <a:xfrm>
-            <a:off x="933450" y="3529584"/>
-            <a:ext cx="1314450" cy="233838"/>
+            <a:off x="609600" y="6553200"/>
+            <a:ext cx="1512379" cy="114300"/>
           </a:xfrm>
           <a:prstGeom prst="rect">
             <a:avLst/>
@@ -7520,9 +8332,6 @@
           <a:lstStyle/>
           <a:p>
             <a:pPr algn="l">
-              <a:lnSpc>
-                <a:spcPts val="1267"/>
-              </a:lnSpc>
               <a:spcBef>
                 <a:spcPts val="0"/>
               </a:spcBef>
@@ -7531,27 +8340,27 @@
               </a:spcAft>
             </a:pPr>
             <a:r>
-              <a:rPr sz="975" b="1" i="0">
-                <a:solidFill>
-                  <a:srgbClr val="1A2430"/>
+              <a:rPr sz="862" b="0" i="0">
+                <a:solidFill>
+                  <a:srgbClr val="5D6B79"/>
                 </a:solidFill>
                 <a:latin typeface="Arial"/>
               </a:rPr>
-              <a:t>Third criterion</a:t>
-            </a:r>
-          </a:p>
-        </p:txBody>
-      </p:sp>
-      <p:sp>
-        <p:nvSpPr>
-          <p:cNvPr id="28" name="TextBox 27"/>
+              <a:t>Surname, Surname, Surname</a:t>
+            </a:r>
+          </a:p>
+        </p:txBody>
+      </p:sp>
+      <p:sp>
+        <p:nvSpPr>
+          <p:cNvPr id="44" name="TextBox 43"/>
           <p:cNvSpPr txBox="1"/>
           <p:nvPr/>
         </p:nvSpPr>
         <p:spPr>
           <a:xfrm>
-            <a:off x="2362200" y="3529584"/>
-            <a:ext cx="3877532" cy="233838"/>
+            <a:off x="2207704" y="6553200"/>
+            <a:ext cx="7976616" cy="114300"/>
           </a:xfrm>
           <a:prstGeom prst="rect">
             <a:avLst/>
@@ -7564,10 +8373,7 @@
           </a:bodyPr>
           <a:lstStyle/>
           <a:p>
-            <a:pPr algn="l">
-              <a:lnSpc>
-                <a:spcPts val="1267"/>
-              </a:lnSpc>
+            <a:pPr algn="ctr">
               <a:spcBef>
                 <a:spcPts val="0"/>
               </a:spcBef>
@@ -7576,27 +8382,27 @@
               </a:spcAft>
             </a:pPr>
             <a:r>
-              <a:rPr sz="975" b="0" i="0">
-                <a:solidFill>
-                  <a:srgbClr val="1A2430"/>
+              <a:rPr sz="862" b="0" i="0">
+                <a:solidFill>
+                  <a:srgbClr val="5D6B79"/>
                 </a:solidFill>
                 <a:latin typeface="Arial"/>
               </a:rPr>
-              <a:t>What option one does</a:t>
-            </a:r>
-          </a:p>
-        </p:txBody>
-      </p:sp>
-      <p:sp>
-        <p:nvSpPr>
-          <p:cNvPr id="29" name="TextBox 28"/>
+              <a:t>Project or client name</a:t>
+            </a:r>
+          </a:p>
+        </p:txBody>
+      </p:sp>
+      <p:sp>
+        <p:nvSpPr>
+          <p:cNvPr id="45" name="TextBox 44"/>
           <p:cNvSpPr txBox="1"/>
           <p:nvPr/>
         </p:nvSpPr>
         <p:spPr>
           <a:xfrm>
-            <a:off x="6354032" y="3529584"/>
-            <a:ext cx="3837717" cy="233838"/>
+            <a:off x="10327195" y="6553200"/>
+            <a:ext cx="994791" cy="114300"/>
           </a:xfrm>
           <a:prstGeom prst="rect">
             <a:avLst/>
@@ -7610,9 +8416,6 @@
           <a:lstStyle/>
           <a:p>
             <a:pPr algn="l">
-              <a:lnSpc>
-                <a:spcPts val="1267"/>
-              </a:lnSpc>
               <a:spcBef>
                 <a:spcPts val="0"/>
               </a:spcBef>
@@ -7621,180 +8424,27 @@
               </a:spcAft>
             </a:pPr>
             <a:r>
-              <a:rPr sz="975" b="0" i="0">
-                <a:solidFill>
-                  <a:srgbClr val="1A2430"/>
+              <a:rPr sz="862" b="0" i="0">
+                <a:solidFill>
+                  <a:srgbClr val="5D6B79"/>
                 </a:solidFill>
                 <a:latin typeface="Arial"/>
               </a:rPr>
-              <a:t>What option two does</a:t>
-            </a:r>
-          </a:p>
-        </p:txBody>
-      </p:sp>
-      <p:sp>
-        <p:nvSpPr>
-          <p:cNvPr id="30" name="Rounded Rectangle 29"/>
-          <p:cNvSpPr/>
-          <p:nvPr/>
-        </p:nvSpPr>
-        <p:spPr>
-          <a:xfrm>
-            <a:off x="10306050" y="3529584"/>
-            <a:ext cx="907256" cy="224313"/>
-          </a:xfrm>
-          <a:prstGeom prst="roundRect">
-            <a:avLst>
-              <a:gd name="adj" fmla="val 50000"/>
-            </a:avLst>
-          </a:prstGeom>
-          <a:solidFill>
-            <a:srgbClr val="5F1937"/>
-          </a:solidFill>
-          <a:ln>
-            <a:noFill/>
-          </a:ln>
-          <a:effectLst/>
-        </p:spPr>
-        <p:style>
-          <a:lnRef idx="1">
-            <a:schemeClr val="accent1"/>
-          </a:lnRef>
-          <a:fillRef idx="3">
-            <a:schemeClr val="accent1"/>
-          </a:fillRef>
-          <a:effectRef idx="2">
-            <a:schemeClr val="accent1"/>
-          </a:effectRef>
-          <a:fontRef idx="minor">
-            <a:schemeClr val="lt1"/>
-          </a:fontRef>
-        </p:style>
-        <p:txBody>
-          <a:bodyPr rtlCol="0" anchor="ctr" wrap="none" lIns="114300" tIns="28575" rIns="114300" bIns="28575">
-            <a:noAutofit/>
-          </a:bodyPr>
-          <a:lstStyle/>
-          <a:p>
-            <a:pPr algn="l">
-              <a:lnSpc>
-                <a:spcPts val="1316"/>
-              </a:lnSpc>
-              <a:spcBef>
-                <a:spcPts val="0"/>
-              </a:spcBef>
-              <a:spcAft>
-                <a:spcPts val="0"/>
-              </a:spcAft>
-            </a:pPr>
-            <a:r>
-              <a:rPr sz="1012" b="1" i="0">
-                <a:solidFill>
-                  <a:srgbClr val="FFFFFF"/>
-                </a:solidFill>
-                <a:latin typeface="Arial"/>
-              </a:rPr>
-              <a:t>Option one</a:t>
-            </a:r>
-          </a:p>
-        </p:txBody>
-      </p:sp>
-      <p:sp>
-        <p:nvSpPr>
-          <p:cNvPr id="31" name="Rectangle 30"/>
-          <p:cNvSpPr/>
-          <p:nvPr/>
-        </p:nvSpPr>
-        <p:spPr>
-          <a:xfrm>
-            <a:off x="847725" y="3811047"/>
-            <a:ext cx="10496550" cy="338613"/>
-          </a:xfrm>
-          <a:prstGeom prst="rect">
-            <a:avLst/>
-          </a:prstGeom>
-          <a:noFill/>
-          <a:ln>
-            <a:noFill/>
-          </a:ln>
-          <a:effectLst/>
-        </p:spPr>
-        <p:style>
-          <a:lnRef idx="1">
-            <a:schemeClr val="accent1"/>
-          </a:lnRef>
-          <a:fillRef idx="3">
-            <a:schemeClr val="accent1"/>
-          </a:fillRef>
-          <a:effectRef idx="2">
-            <a:schemeClr val="accent1"/>
-          </a:effectRef>
-          <a:fontRef idx="minor">
-            <a:schemeClr val="lt1"/>
-          </a:fontRef>
-        </p:style>
-        <p:txBody>
-          <a:bodyPr rtlCol="0" anchor="ctr"/>
-          <a:lstStyle/>
-          <a:p>
-            <a:pPr algn="ctr"/>
-          </a:p>
-        </p:txBody>
-      </p:sp>
-      <p:sp>
-        <p:nvSpPr>
-          <p:cNvPr id="32" name="Rectangle 31"/>
-          <p:cNvSpPr/>
-          <p:nvPr/>
-        </p:nvSpPr>
-        <p:spPr>
-          <a:xfrm>
-            <a:off x="847725" y="4140136"/>
-            <a:ext cx="10496550" cy="9525"/>
-          </a:xfrm>
-          <a:prstGeom prst="rect">
-            <a:avLst/>
-          </a:prstGeom>
-          <a:solidFill>
-            <a:srgbClr val="D9E0E7"/>
-          </a:solidFill>
-          <a:ln>
-            <a:noFill/>
-          </a:ln>
-          <a:effectLst/>
-        </p:spPr>
-        <p:style>
-          <a:lnRef idx="1">
-            <a:schemeClr val="accent1"/>
-          </a:lnRef>
-          <a:fillRef idx="3">
-            <a:schemeClr val="accent1"/>
-          </a:fillRef>
-          <a:effectRef idx="2">
-            <a:schemeClr val="accent1"/>
-          </a:effectRef>
-          <a:fontRef idx="minor">
-            <a:schemeClr val="lt1"/>
-          </a:fontRef>
-        </p:style>
-        <p:txBody>
-          <a:bodyPr rtlCol="0" anchor="ctr"/>
-          <a:lstStyle/>
-          <a:p>
-            <a:pPr algn="ctr"/>
-          </a:p>
-        </p:txBody>
-      </p:sp>
-      <p:sp>
-        <p:nvSpPr>
-          <p:cNvPr id="33" name="TextBox 32"/>
+              <a:t>Programme, Group</a:t>
+            </a:r>
+          </a:p>
+        </p:txBody>
+      </p:sp>
+      <p:sp>
+        <p:nvSpPr>
+          <p:cNvPr id="46" name="TextBox 45"/>
           <p:cNvSpPr txBox="1"/>
           <p:nvPr/>
         </p:nvSpPr>
         <p:spPr>
           <a:xfrm>
-            <a:off x="933450" y="3868197"/>
-            <a:ext cx="1314450" cy="233838"/>
+            <a:off x="11436286" y="6553200"/>
+            <a:ext cx="203263" cy="114300"/>
           </a:xfrm>
           <a:prstGeom prst="rect">
             <a:avLst/>
@@ -7808,9 +8458,6 @@
           <a:lstStyle/>
           <a:p>
             <a:pPr algn="l">
-              <a:lnSpc>
-                <a:spcPts val="1267"/>
-              </a:lnSpc>
               <a:spcBef>
                 <a:spcPts val="0"/>
               </a:spcBef>
@@ -7819,654 +8466,7 @@
               </a:spcAft>
             </a:pPr>
             <a:r>
-              <a:rPr sz="975" b="1" i="0">
-                <a:solidFill>
-                  <a:srgbClr val="1A2430"/>
-                </a:solidFill>
-                <a:latin typeface="Arial"/>
-              </a:rPr>
-              <a:t>Fourth criterion</a:t>
-            </a:r>
-          </a:p>
-        </p:txBody>
-      </p:sp>
-      <p:sp>
-        <p:nvSpPr>
-          <p:cNvPr id="34" name="TextBox 33"/>
-          <p:cNvSpPr txBox="1"/>
-          <p:nvPr/>
-        </p:nvSpPr>
-        <p:spPr>
-          <a:xfrm>
-            <a:off x="2362200" y="3868197"/>
-            <a:ext cx="3877532" cy="233838"/>
-          </a:xfrm>
-          <a:prstGeom prst="rect">
-            <a:avLst/>
-          </a:prstGeom>
-          <a:noFill/>
-        </p:spPr>
-        <p:txBody>
-          <a:bodyPr wrap="square" anchor="t" lIns="0" tIns="0" rIns="0" bIns="0">
-            <a:noAutofit/>
-          </a:bodyPr>
-          <a:lstStyle/>
-          <a:p>
-            <a:pPr algn="l">
-              <a:lnSpc>
-                <a:spcPts val="1267"/>
-              </a:lnSpc>
-              <a:spcBef>
-                <a:spcPts val="0"/>
-              </a:spcBef>
-              <a:spcAft>
-                <a:spcPts val="0"/>
-              </a:spcAft>
-            </a:pPr>
-            <a:r>
-              <a:rPr sz="975" b="0" i="0">
-                <a:solidFill>
-                  <a:srgbClr val="1A2430"/>
-                </a:solidFill>
-                <a:latin typeface="Arial"/>
-              </a:rPr>
-              <a:t>What option one does</a:t>
-            </a:r>
-          </a:p>
-        </p:txBody>
-      </p:sp>
-      <p:sp>
-        <p:nvSpPr>
-          <p:cNvPr id="35" name="TextBox 34"/>
-          <p:cNvSpPr txBox="1"/>
-          <p:nvPr/>
-        </p:nvSpPr>
-        <p:spPr>
-          <a:xfrm>
-            <a:off x="6354032" y="3868197"/>
-            <a:ext cx="3837717" cy="233838"/>
-          </a:xfrm>
-          <a:prstGeom prst="rect">
-            <a:avLst/>
-          </a:prstGeom>
-          <a:noFill/>
-        </p:spPr>
-        <p:txBody>
-          <a:bodyPr wrap="square" anchor="t" lIns="0" tIns="0" rIns="0" bIns="0">
-            <a:noAutofit/>
-          </a:bodyPr>
-          <a:lstStyle/>
-          <a:p>
-            <a:pPr algn="l">
-              <a:lnSpc>
-                <a:spcPts val="1267"/>
-              </a:lnSpc>
-              <a:spcBef>
-                <a:spcPts val="0"/>
-              </a:spcBef>
-              <a:spcAft>
-                <a:spcPts val="0"/>
-              </a:spcAft>
-            </a:pPr>
-            <a:r>
-              <a:rPr sz="975" b="0" i="0">
-                <a:solidFill>
-                  <a:srgbClr val="1A2430"/>
-                </a:solidFill>
-                <a:latin typeface="Arial"/>
-              </a:rPr>
-              <a:t>What option two does</a:t>
-            </a:r>
-          </a:p>
-        </p:txBody>
-      </p:sp>
-      <p:sp>
-        <p:nvSpPr>
-          <p:cNvPr id="36" name="Rounded Rectangle 35"/>
-          <p:cNvSpPr/>
-          <p:nvPr/>
-        </p:nvSpPr>
-        <p:spPr>
-          <a:xfrm>
-            <a:off x="10306050" y="3868197"/>
-            <a:ext cx="671703" cy="224313"/>
-          </a:xfrm>
-          <a:prstGeom prst="roundRect">
-            <a:avLst>
-              <a:gd name="adj" fmla="val 50000"/>
-            </a:avLst>
-          </a:prstGeom>
-          <a:solidFill>
-            <a:srgbClr val="EEDCE4"/>
-          </a:solidFill>
-          <a:ln>
-            <a:noFill/>
-          </a:ln>
-          <a:effectLst/>
-        </p:spPr>
-        <p:style>
-          <a:lnRef idx="1">
-            <a:schemeClr val="accent1"/>
-          </a:lnRef>
-          <a:fillRef idx="3">
-            <a:schemeClr val="accent1"/>
-          </a:fillRef>
-          <a:effectRef idx="2">
-            <a:schemeClr val="accent1"/>
-          </a:effectRef>
-          <a:fontRef idx="minor">
-            <a:schemeClr val="lt1"/>
-          </a:fontRef>
-        </p:style>
-        <p:txBody>
-          <a:bodyPr rtlCol="0" anchor="ctr" wrap="none" lIns="114300" tIns="28575" rIns="114300" bIns="28575">
-            <a:noAutofit/>
-          </a:bodyPr>
-          <a:lstStyle/>
-          <a:p>
-            <a:pPr algn="l">
-              <a:lnSpc>
-                <a:spcPts val="1316"/>
-              </a:lnSpc>
-              <a:spcBef>
-                <a:spcPts val="0"/>
-              </a:spcBef>
-              <a:spcAft>
-                <a:spcPts val="0"/>
-              </a:spcAft>
-            </a:pPr>
-            <a:r>
-              <a:rPr sz="1012" b="1" i="0">
-                <a:solidFill>
-                  <a:srgbClr val="431127"/>
-                </a:solidFill>
-                <a:latin typeface="Arial"/>
-              </a:rPr>
-              <a:t>Neither</a:t>
-            </a:r>
-          </a:p>
-        </p:txBody>
-      </p:sp>
-      <p:sp>
-        <p:nvSpPr>
-          <p:cNvPr id="37" name="Rectangle 36"/>
-          <p:cNvSpPr/>
-          <p:nvPr/>
-        </p:nvSpPr>
-        <p:spPr>
-          <a:xfrm>
-            <a:off x="609600" y="4506849"/>
-            <a:ext cx="5410200" cy="615219"/>
-          </a:xfrm>
-          <a:prstGeom prst="rect">
-            <a:avLst/>
-          </a:prstGeom>
-          <a:solidFill>
-            <a:srgbClr val="F8F1F4"/>
-          </a:solidFill>
-          <a:ln>
-            <a:noFill/>
-          </a:ln>
-          <a:effectLst/>
-        </p:spPr>
-        <p:style>
-          <a:lnRef idx="1">
-            <a:schemeClr val="accent1"/>
-          </a:lnRef>
-          <a:fillRef idx="3">
-            <a:schemeClr val="accent1"/>
-          </a:fillRef>
-          <a:effectRef idx="2">
-            <a:schemeClr val="accent1"/>
-          </a:effectRef>
-          <a:fontRef idx="minor">
-            <a:schemeClr val="lt1"/>
-          </a:fontRef>
-        </p:style>
-        <p:txBody>
-          <a:bodyPr rtlCol="0" anchor="t" wrap="none" lIns="171450" tIns="114300" rIns="171450" bIns="114300">
-            <a:noAutofit/>
-          </a:bodyPr>
-          <a:lstStyle/>
-          <a:p>
-            <a:pPr algn="l">
-              <a:lnSpc>
-                <a:spcPts val="1522"/>
-              </a:lnSpc>
-              <a:spcBef>
-                <a:spcPts val="0"/>
-              </a:spcBef>
-              <a:spcAft>
-                <a:spcPts val="0"/>
-              </a:spcAft>
-            </a:pPr>
-            <a:r>
-              <a:rPr sz="1087" b="1" i="0">
-                <a:solidFill>
-                  <a:srgbClr val="431127"/>
-                </a:solidFill>
-                <a:latin typeface="Arial"/>
-              </a:rPr>
-              <a:t>A neutral note:</a:t>
-            </a:r>
-            <a:r>
-              <a:rPr sz="1087" b="0" i="0">
-                <a:solidFill>
-                  <a:srgbClr val="1A2430"/>
-                </a:solidFill>
-                <a:latin typeface="Arial"/>
-              </a:rPr>
-              <a:t> the blue strip carries a qualification that supports the argument.</a:t>
-            </a:r>
-          </a:p>
-        </p:txBody>
-      </p:sp>
-      <p:sp>
-        <p:nvSpPr>
-          <p:cNvPr id="38" name="Rectangle 37"/>
-          <p:cNvSpPr/>
-          <p:nvPr/>
-        </p:nvSpPr>
-        <p:spPr>
-          <a:xfrm>
-            <a:off x="609600" y="4506849"/>
-            <a:ext cx="47625" cy="615219"/>
-          </a:xfrm>
-          <a:prstGeom prst="rect">
-            <a:avLst/>
-          </a:prstGeom>
-          <a:solidFill>
-            <a:srgbClr val="5F1937"/>
-          </a:solidFill>
-          <a:ln>
-            <a:noFill/>
-          </a:ln>
-          <a:effectLst/>
-        </p:spPr>
-        <p:style>
-          <a:lnRef idx="1">
-            <a:schemeClr val="accent1"/>
-          </a:lnRef>
-          <a:fillRef idx="3">
-            <a:schemeClr val="accent1"/>
-          </a:fillRef>
-          <a:effectRef idx="2">
-            <a:schemeClr val="accent1"/>
-          </a:effectRef>
-          <a:fontRef idx="minor">
-            <a:schemeClr val="lt1"/>
-          </a:fontRef>
-        </p:style>
-        <p:txBody>
-          <a:bodyPr rtlCol="0" anchor="ctr"/>
-          <a:lstStyle/>
-          <a:p>
-            <a:pPr algn="ctr"/>
-          </a:p>
-        </p:txBody>
-      </p:sp>
-      <p:sp>
-        <p:nvSpPr>
-          <p:cNvPr id="39" name="Rectangle 38"/>
-          <p:cNvSpPr/>
-          <p:nvPr/>
-        </p:nvSpPr>
-        <p:spPr>
-          <a:xfrm>
-            <a:off x="6172200" y="4506849"/>
-            <a:ext cx="5410200" cy="615219"/>
-          </a:xfrm>
-          <a:prstGeom prst="rect">
-            <a:avLst/>
-          </a:prstGeom>
-          <a:solidFill>
-            <a:srgbClr val="FAF4EA"/>
-          </a:solidFill>
-          <a:ln>
-            <a:noFill/>
-          </a:ln>
-          <a:effectLst/>
-        </p:spPr>
-        <p:style>
-          <a:lnRef idx="1">
-            <a:schemeClr val="accent1"/>
-          </a:lnRef>
-          <a:fillRef idx="3">
-            <a:schemeClr val="accent1"/>
-          </a:fillRef>
-          <a:effectRef idx="2">
-            <a:schemeClr val="accent1"/>
-          </a:effectRef>
-          <a:fontRef idx="minor">
-            <a:schemeClr val="lt1"/>
-          </a:fontRef>
-        </p:style>
-        <p:txBody>
-          <a:bodyPr rtlCol="0" anchor="t" wrap="square" lIns="171450" tIns="114300" rIns="171450" bIns="114300">
-            <a:noAutofit/>
-          </a:bodyPr>
-          <a:lstStyle/>
-          <a:p>
-            <a:pPr algn="l">
-              <a:lnSpc>
-                <a:spcPts val="1522"/>
-              </a:lnSpc>
-              <a:spcBef>
-                <a:spcPts val="0"/>
-              </a:spcBef>
-              <a:spcAft>
-                <a:spcPts val="0"/>
-              </a:spcAft>
-            </a:pPr>
-            <a:r>
-              <a:rPr sz="1087" b="1" i="0">
-                <a:solidFill>
-                  <a:srgbClr val="431127"/>
-                </a:solidFill>
-                <a:latin typeface="Arial"/>
-              </a:rPr>
-              <a:t>A warning note:</a:t>
-            </a:r>
-            <a:r>
-              <a:rPr sz="1087" b="0" i="0">
-                <a:solidFill>
-                  <a:srgbClr val="1A2430"/>
-                </a:solidFill>
-                <a:latin typeface="Arial"/>
-              </a:rPr>
-              <a:t> the warm strip is reserved for a genuine caution, at most once per slide.</a:t>
-            </a:r>
-          </a:p>
-        </p:txBody>
-      </p:sp>
-      <p:sp>
-        <p:nvSpPr>
-          <p:cNvPr id="40" name="Rectangle 39"/>
-          <p:cNvSpPr/>
-          <p:nvPr/>
-        </p:nvSpPr>
-        <p:spPr>
-          <a:xfrm>
-            <a:off x="6172200" y="4506849"/>
-            <a:ext cx="47625" cy="615219"/>
-          </a:xfrm>
-          <a:prstGeom prst="rect">
-            <a:avLst/>
-          </a:prstGeom>
-          <a:solidFill>
-            <a:srgbClr val="C08A2E"/>
-          </a:solidFill>
-          <a:ln>
-            <a:noFill/>
-          </a:ln>
-          <a:effectLst/>
-        </p:spPr>
-        <p:style>
-          <a:lnRef idx="1">
-            <a:schemeClr val="accent1"/>
-          </a:lnRef>
-          <a:fillRef idx="3">
-            <a:schemeClr val="accent1"/>
-          </a:fillRef>
-          <a:effectRef idx="2">
-            <a:schemeClr val="accent1"/>
-          </a:effectRef>
-          <a:fontRef idx="minor">
-            <a:schemeClr val="lt1"/>
-          </a:fontRef>
-        </p:style>
-        <p:txBody>
-          <a:bodyPr rtlCol="0" anchor="ctr"/>
-          <a:lstStyle/>
-          <a:p>
-            <a:pPr algn="ctr"/>
-          </a:p>
-        </p:txBody>
-      </p:sp>
-      <p:sp>
-        <p:nvSpPr>
-          <p:cNvPr id="41" name="Rectangle 40"/>
-          <p:cNvSpPr/>
-          <p:nvPr/>
-        </p:nvSpPr>
-        <p:spPr>
-          <a:xfrm>
-            <a:off x="609600" y="6448425"/>
-            <a:ext cx="10972800" cy="219075"/>
-          </a:xfrm>
-          <a:prstGeom prst="rect">
-            <a:avLst/>
-          </a:prstGeom>
-          <a:noFill/>
-          <a:ln>
-            <a:noFill/>
-          </a:ln>
-          <a:effectLst/>
-        </p:spPr>
-        <p:style>
-          <a:lnRef idx="1">
-            <a:schemeClr val="accent1"/>
-          </a:lnRef>
-          <a:fillRef idx="3">
-            <a:schemeClr val="accent1"/>
-          </a:fillRef>
-          <a:effectRef idx="2">
-            <a:schemeClr val="accent1"/>
-          </a:effectRef>
-          <a:fontRef idx="minor">
-            <a:schemeClr val="lt1"/>
-          </a:fontRef>
-        </p:style>
-        <p:txBody>
-          <a:bodyPr rtlCol="0" anchor="ctr"/>
-          <a:lstStyle/>
-          <a:p>
-            <a:pPr algn="ctr"/>
-          </a:p>
-        </p:txBody>
-      </p:sp>
-      <p:sp>
-        <p:nvSpPr>
-          <p:cNvPr id="42" name="Rectangle 41"/>
-          <p:cNvSpPr/>
-          <p:nvPr/>
-        </p:nvSpPr>
-        <p:spPr>
-          <a:xfrm>
-            <a:off x="609600" y="6448425"/>
-            <a:ext cx="10972800" cy="9525"/>
-          </a:xfrm>
-          <a:prstGeom prst="rect">
-            <a:avLst/>
-          </a:prstGeom>
-          <a:solidFill>
-            <a:srgbClr val="D9E0E7"/>
-          </a:solidFill>
-          <a:ln>
-            <a:noFill/>
-          </a:ln>
-          <a:effectLst/>
-        </p:spPr>
-        <p:style>
-          <a:lnRef idx="1">
-            <a:schemeClr val="accent1"/>
-          </a:lnRef>
-          <a:fillRef idx="3">
-            <a:schemeClr val="accent1"/>
-          </a:fillRef>
-          <a:effectRef idx="2">
-            <a:schemeClr val="accent1"/>
-          </a:effectRef>
-          <a:fontRef idx="minor">
-            <a:schemeClr val="lt1"/>
-          </a:fontRef>
-        </p:style>
-        <p:txBody>
-          <a:bodyPr rtlCol="0" anchor="ctr"/>
-          <a:lstStyle/>
-          <a:p>
-            <a:pPr algn="ctr"/>
-          </a:p>
-        </p:txBody>
-      </p:sp>
-      <p:sp>
-        <p:nvSpPr>
-          <p:cNvPr id="43" name="TextBox 42"/>
-          <p:cNvSpPr txBox="1"/>
-          <p:nvPr/>
-        </p:nvSpPr>
-        <p:spPr>
-          <a:xfrm>
-            <a:off x="609600" y="6534150"/>
-            <a:ext cx="1575625" cy="133350"/>
-          </a:xfrm>
-          <a:prstGeom prst="rect">
-            <a:avLst/>
-          </a:prstGeom>
-          <a:noFill/>
-        </p:spPr>
-        <p:txBody>
-          <a:bodyPr wrap="square" anchor="t" lIns="0" tIns="0" rIns="0" bIns="0">
-            <a:noAutofit/>
-          </a:bodyPr>
-          <a:lstStyle/>
-          <a:p>
-            <a:pPr algn="l">
-              <a:spcBef>
-                <a:spcPts val="0"/>
-              </a:spcBef>
-              <a:spcAft>
-                <a:spcPts val="0"/>
-              </a:spcAft>
-            </a:pPr>
-            <a:r>
-              <a:rPr sz="900" b="0" i="0">
-                <a:solidFill>
-                  <a:srgbClr val="5D6B79"/>
-                </a:solidFill>
-                <a:latin typeface="Arial"/>
-              </a:rPr>
-              <a:t>Surname, Surname, Surname</a:t>
-            </a:r>
-          </a:p>
-        </p:txBody>
-      </p:sp>
-      <p:sp>
-        <p:nvSpPr>
-          <p:cNvPr id="44" name="TextBox 43"/>
-          <p:cNvSpPr txBox="1"/>
-          <p:nvPr/>
-        </p:nvSpPr>
-        <p:spPr>
-          <a:xfrm>
-            <a:off x="2270950" y="6534150"/>
-            <a:ext cx="7866316" cy="133350"/>
-          </a:xfrm>
-          <a:prstGeom prst="rect">
-            <a:avLst/>
-          </a:prstGeom>
-          <a:noFill/>
-        </p:spPr>
-        <p:txBody>
-          <a:bodyPr wrap="square" anchor="t" lIns="0" tIns="0" rIns="0" bIns="0">
-            <a:noAutofit/>
-          </a:bodyPr>
-          <a:lstStyle/>
-          <a:p>
-            <a:pPr algn="ctr">
-              <a:spcBef>
-                <a:spcPts val="0"/>
-              </a:spcBef>
-              <a:spcAft>
-                <a:spcPts val="0"/>
-              </a:spcAft>
-            </a:pPr>
-            <a:r>
-              <a:rPr sz="900" b="0" i="0">
-                <a:solidFill>
-                  <a:srgbClr val="5D6B79"/>
-                </a:solidFill>
-                <a:latin typeface="Arial"/>
-              </a:rPr>
-              <a:t>Project or client name</a:t>
-            </a:r>
-          </a:p>
-        </p:txBody>
-      </p:sp>
-      <p:sp>
-        <p:nvSpPr>
-          <p:cNvPr id="45" name="TextBox 44"/>
-          <p:cNvSpPr txBox="1"/>
-          <p:nvPr/>
-        </p:nvSpPr>
-        <p:spPr>
-          <a:xfrm>
-            <a:off x="10280142" y="6534150"/>
-            <a:ext cx="1035367" cy="133350"/>
-          </a:xfrm>
-          <a:prstGeom prst="rect">
-            <a:avLst/>
-          </a:prstGeom>
-          <a:noFill/>
-        </p:spPr>
-        <p:txBody>
-          <a:bodyPr wrap="square" anchor="t" lIns="0" tIns="0" rIns="0" bIns="0">
-            <a:noAutofit/>
-          </a:bodyPr>
-          <a:lstStyle/>
-          <a:p>
-            <a:pPr algn="l">
-              <a:spcBef>
-                <a:spcPts val="0"/>
-              </a:spcBef>
-              <a:spcAft>
-                <a:spcPts val="0"/>
-              </a:spcAft>
-            </a:pPr>
-            <a:r>
-              <a:rPr sz="900" b="0" i="0">
-                <a:solidFill>
-                  <a:srgbClr val="5D6B79"/>
-                </a:solidFill>
-                <a:latin typeface="Arial"/>
-              </a:rPr>
-              <a:t>Programme, Group</a:t>
-            </a:r>
-          </a:p>
-        </p:txBody>
-      </p:sp>
-      <p:sp>
-        <p:nvSpPr>
-          <p:cNvPr id="46" name="TextBox 45"/>
-          <p:cNvSpPr txBox="1"/>
-          <p:nvPr/>
-        </p:nvSpPr>
-        <p:spPr>
-          <a:xfrm>
-            <a:off x="11429809" y="6534150"/>
-            <a:ext cx="209740" cy="133350"/>
-          </a:xfrm>
-          <a:prstGeom prst="rect">
-            <a:avLst/>
-          </a:prstGeom>
-          <a:noFill/>
-        </p:spPr>
-        <p:txBody>
-          <a:bodyPr wrap="square" anchor="t" lIns="0" tIns="0" rIns="0" bIns="0">
-            <a:noAutofit/>
-          </a:bodyPr>
-          <a:lstStyle/>
-          <a:p>
-            <a:pPr algn="l">
-              <a:spcBef>
-                <a:spcPts val="0"/>
-              </a:spcBef>
-              <a:spcAft>
-                <a:spcPts val="0"/>
-              </a:spcAft>
-            </a:pPr>
-            <a:r>
-              <a:rPr sz="900" b="0" i="0">
+              <a:rPr sz="862" b="0" i="0">
                 <a:solidFill>
                   <a:srgbClr val="5D6B79"/>
                 </a:solidFill>
@@ -8479,7 +8479,7 @@
       </p:sp>
       <p:pic>
         <p:nvPicPr>
-          <p:cNvPr id="47" name="Picture 46" descr="icon0013.png"/>
+          <p:cNvPr id="47" name="Picture 46" descr="icon0014.png"/>
           <p:cNvPicPr>
             <a:picLocks noChangeAspect="1"/>
           </p:cNvPicPr>
@@ -8701,12 +8701,12 @@
         </p:nvSpPr>
         <p:spPr>
           <a:xfrm>
-            <a:off x="609600" y="2140267"/>
-            <a:ext cx="10972800" cy="1371600"/>
+            <a:off x="609600" y="2143696"/>
+            <a:ext cx="10972800" cy="1381125"/>
           </a:xfrm>
           <a:prstGeom prst="roundRect">
             <a:avLst>
-              <a:gd name="adj" fmla="val 6944"/>
+              <a:gd name="adj" fmla="val 6896"/>
             </a:avLst>
           </a:prstGeom>
           <a:noFill/>
@@ -8747,8 +8747,8 @@
         </p:nvSpPr>
         <p:spPr>
           <a:xfrm>
-            <a:off x="809625" y="2073592"/>
-            <a:ext cx="2227802" cy="114300"/>
+            <a:off x="809625" y="2077021"/>
+            <a:ext cx="2321242" cy="114300"/>
           </a:xfrm>
           <a:prstGeom prst="rect">
             <a:avLst/>
@@ -8790,7 +8790,7 @@
               </a:spcAft>
             </a:pPr>
             <a:r>
-              <a:rPr sz="825" b="1" i="0" spc="82">
+              <a:rPr sz="862" b="1" i="0" spc="86">
                 <a:solidFill>
                   <a:srgbClr val="5F1937"/>
                 </a:solidFill>
@@ -8809,7 +8809,7 @@
         </p:nvSpPr>
         <p:spPr>
           <a:xfrm>
-            <a:off x="809625" y="2454592"/>
+            <a:off x="809625" y="2458021"/>
             <a:ext cx="1181100" cy="152400"/>
           </a:xfrm>
           <a:prstGeom prst="rect">
@@ -8832,7 +8832,7 @@
               </a:spcAft>
             </a:pPr>
             <a:r>
-              <a:rPr sz="1087" b="1" i="0">
+              <a:rPr sz="1050" b="1" i="0">
                 <a:solidFill>
                   <a:srgbClr val="431127"/>
                 </a:solidFill>
@@ -8851,12 +8851,12 @@
         </p:nvSpPr>
         <p:spPr>
           <a:xfrm>
-            <a:off x="2057400" y="2378392"/>
-            <a:ext cx="8324850" cy="304800"/>
+            <a:off x="2047875" y="2381821"/>
+            <a:ext cx="8343900" cy="304800"/>
           </a:xfrm>
           <a:prstGeom prst="roundRect">
             <a:avLst>
-              <a:gd name="adj" fmla="val 15625"/>
+              <a:gd name="adj" fmla="val 12500"/>
             </a:avLst>
           </a:prstGeom>
           <a:solidFill>
@@ -8897,12 +8897,12 @@
         </p:nvSpPr>
         <p:spPr>
           <a:xfrm>
-            <a:off x="2057400" y="2378392"/>
-            <a:ext cx="1165479" cy="304800"/>
+            <a:off x="2047875" y="2381821"/>
+            <a:ext cx="1168050" cy="304800"/>
           </a:xfrm>
           <a:prstGeom prst="roundRect">
             <a:avLst>
-              <a:gd name="adj" fmla="val 15625"/>
+              <a:gd name="adj" fmla="val 12500"/>
             </a:avLst>
           </a:prstGeom>
           <a:solidFill>
@@ -8961,8 +8961,8 @@
         </p:nvSpPr>
         <p:spPr>
           <a:xfrm>
-            <a:off x="3222879" y="2378392"/>
-            <a:ext cx="2580703" cy="304800"/>
+            <a:off x="3215925" y="2381821"/>
+            <a:ext cx="2586513" cy="304800"/>
           </a:xfrm>
           <a:prstGeom prst="rect">
             <a:avLst/>
@@ -9023,7 +9023,7 @@
         </p:nvSpPr>
         <p:spPr>
           <a:xfrm>
-            <a:off x="10477500" y="2445067"/>
+            <a:off x="10477500" y="2448496"/>
             <a:ext cx="933450" cy="171450"/>
           </a:xfrm>
           <a:prstGeom prst="rect">
@@ -9046,7 +9046,7 @@
               </a:spcAft>
             </a:pPr>
             <a:r>
-              <a:rPr sz="1200" b="1" i="0">
+              <a:rPr sz="1162" b="1" i="0">
                 <a:solidFill>
                   <a:srgbClr val="5F1937"/>
                 </a:solidFill>
@@ -9065,7 +9065,7 @@
         </p:nvSpPr>
         <p:spPr>
           <a:xfrm>
-            <a:off x="809625" y="2873692"/>
+            <a:off x="809625" y="2877121"/>
             <a:ext cx="1181100" cy="152400"/>
           </a:xfrm>
           <a:prstGeom prst="rect">
@@ -9088,7 +9088,7 @@
               </a:spcAft>
             </a:pPr>
             <a:r>
-              <a:rPr sz="1087" b="1" i="0">
+              <a:rPr sz="1050" b="1" i="0">
                 <a:solidFill>
                   <a:srgbClr val="431127"/>
                 </a:solidFill>
@@ -9107,12 +9107,12 @@
         </p:nvSpPr>
         <p:spPr>
           <a:xfrm>
-            <a:off x="2057400" y="2797492"/>
-            <a:ext cx="8324850" cy="304800"/>
+            <a:off x="2047875" y="2800921"/>
+            <a:ext cx="8343900" cy="304800"/>
           </a:xfrm>
           <a:prstGeom prst="roundRect">
             <a:avLst>
-              <a:gd name="adj" fmla="val 15625"/>
+              <a:gd name="adj" fmla="val 12500"/>
             </a:avLst>
           </a:prstGeom>
           <a:solidFill>
@@ -9153,12 +9153,12 @@
         </p:nvSpPr>
         <p:spPr>
           <a:xfrm>
-            <a:off x="2057400" y="2797492"/>
-            <a:ext cx="2663856" cy="304800"/>
+            <a:off x="2047875" y="2800921"/>
+            <a:ext cx="2669952" cy="304800"/>
           </a:xfrm>
           <a:prstGeom prst="roundRect">
             <a:avLst>
-              <a:gd name="adj" fmla="val 15625"/>
+              <a:gd name="adj" fmla="val 12500"/>
             </a:avLst>
           </a:prstGeom>
           <a:solidFill>
@@ -9217,8 +9217,8 @@
         </p:nvSpPr>
         <p:spPr>
           <a:xfrm>
-            <a:off x="4721256" y="2797492"/>
-            <a:ext cx="3329844" cy="304800"/>
+            <a:off x="4717827" y="2800921"/>
+            <a:ext cx="3337464" cy="304800"/>
           </a:xfrm>
           <a:prstGeom prst="rect">
             <a:avLst/>
@@ -9279,7 +9279,7 @@
         </p:nvSpPr>
         <p:spPr>
           <a:xfrm>
-            <a:off x="10477500" y="2864167"/>
+            <a:off x="10477500" y="2867596"/>
             <a:ext cx="933450" cy="171450"/>
           </a:xfrm>
           <a:prstGeom prst="rect">
@@ -9302,7 +9302,7 @@
               </a:spcAft>
             </a:pPr>
             <a:r>
-              <a:rPr sz="1200" b="1" i="0">
+              <a:rPr sz="1162" b="1" i="0">
                 <a:solidFill>
                   <a:srgbClr val="431127"/>
                 </a:solidFill>
@@ -9321,8 +9321,8 @@
         </p:nvSpPr>
         <p:spPr>
           <a:xfrm>
-            <a:off x="809625" y="3216592"/>
-            <a:ext cx="1015650" cy="133350"/>
+            <a:off x="809625" y="3220021"/>
+            <a:ext cx="1049655" cy="142875"/>
           </a:xfrm>
           <a:prstGeom prst="rect">
             <a:avLst/>
@@ -9344,7 +9344,7 @@
               </a:spcAft>
             </a:pPr>
             <a:r>
-              <a:rPr sz="937" b="0" i="0">
+              <a:rPr sz="975" b="0" i="0">
                 <a:solidFill>
                   <a:srgbClr val="5D6B79"/>
                 </a:solidFill>
@@ -9363,7 +9363,7 @@
         </p:nvSpPr>
         <p:spPr>
           <a:xfrm>
-            <a:off x="809625" y="3230880"/>
+            <a:off x="809625" y="3239071"/>
             <a:ext cx="104775" cy="104775"/>
           </a:xfrm>
           <a:prstGeom prst="roundRect">
@@ -9409,8 +9409,8 @@
         </p:nvSpPr>
         <p:spPr>
           <a:xfrm>
-            <a:off x="1996725" y="3216592"/>
-            <a:ext cx="1187958" cy="133350"/>
+            <a:off x="2030730" y="3220021"/>
+            <a:ext cx="1229010" cy="142875"/>
           </a:xfrm>
           <a:prstGeom prst="rect">
             <a:avLst/>
@@ -9432,7 +9432,7 @@
               </a:spcAft>
             </a:pPr>
             <a:r>
-              <a:rPr sz="937" b="0" i="0">
+              <a:rPr sz="975" b="0" i="0">
                 <a:solidFill>
                   <a:srgbClr val="5D6B79"/>
                 </a:solidFill>
@@ -9451,7 +9451,7 @@
         </p:nvSpPr>
         <p:spPr>
           <a:xfrm>
-            <a:off x="1996725" y="3230880"/>
+            <a:off x="2030730" y="3239071"/>
             <a:ext cx="104775" cy="104775"/>
           </a:xfrm>
           <a:prstGeom prst="roundRect">
@@ -9497,8 +9497,8 @@
         </p:nvSpPr>
         <p:spPr>
           <a:xfrm>
-            <a:off x="3356038" y="3216592"/>
-            <a:ext cx="1523142" cy="133350"/>
+            <a:off x="3431190" y="3220021"/>
+            <a:ext cx="1521618" cy="142875"/>
           </a:xfrm>
           <a:prstGeom prst="rect">
             <a:avLst/>
@@ -9520,7 +9520,7 @@
               </a:spcAft>
             </a:pPr>
             <a:r>
-              <a:rPr sz="937" b="0" i="0">
+              <a:rPr sz="975" b="0" i="0">
                 <a:solidFill>
                   <a:srgbClr val="5D6B79"/>
                 </a:solidFill>
@@ -9539,7 +9539,7 @@
         </p:nvSpPr>
         <p:spPr>
           <a:xfrm>
-            <a:off x="3356038" y="3216592"/>
+            <a:off x="3431190" y="3224784"/>
             <a:ext cx="19050" cy="133350"/>
           </a:xfrm>
           <a:prstGeom prst="rect">
@@ -9583,12 +9583,12 @@
         </p:nvSpPr>
         <p:spPr>
           <a:xfrm>
-            <a:off x="609600" y="3673792"/>
-            <a:ext cx="3543300" cy="1593532"/>
+            <a:off x="609600" y="3686746"/>
+            <a:ext cx="3543300" cy="1577244"/>
           </a:xfrm>
           <a:prstGeom prst="roundRect">
             <a:avLst>
-              <a:gd name="adj" fmla="val 7172"/>
+              <a:gd name="adj" fmla="val 7246"/>
             </a:avLst>
           </a:prstGeom>
           <a:solidFill>
@@ -9631,8 +9631,8 @@
         </p:nvSpPr>
         <p:spPr>
           <a:xfrm>
-            <a:off x="790575" y="4292917"/>
-            <a:ext cx="3181350" cy="447675"/>
+            <a:off x="790575" y="4305871"/>
+            <a:ext cx="3181350" cy="438150"/>
           </a:xfrm>
           <a:prstGeom prst="rect">
             <a:avLst/>
@@ -9647,7 +9647,7 @@
           <a:p>
             <a:pPr algn="ctr">
               <a:lnSpc>
-                <a:spcPts val="3525"/>
+                <a:spcPts val="3450"/>
               </a:lnSpc>
               <a:spcBef>
                 <a:spcPts val="0"/>
@@ -9657,7 +9657,7 @@
               </a:spcAft>
             </a:pPr>
             <a:r>
-              <a:rPr sz="3525" b="1" i="0">
+              <a:rPr sz="3450" b="1" i="0">
                 <a:solidFill>
                   <a:srgbClr val="5F1937"/>
                 </a:solidFill>
@@ -9676,8 +9676,8 @@
         </p:nvSpPr>
         <p:spPr>
           <a:xfrm>
-            <a:off x="762000" y="4892992"/>
-            <a:ext cx="3238500" cy="193357"/>
+            <a:off x="762000" y="4886896"/>
+            <a:ext cx="3238500" cy="186594"/>
           </a:xfrm>
           <a:prstGeom prst="rect">
             <a:avLst/>
@@ -9692,7 +9692,7 @@
           <a:p>
             <a:pPr algn="ctr">
               <a:lnSpc>
-                <a:spcPts val="1522"/>
+                <a:spcPts val="1470"/>
               </a:lnSpc>
               <a:spcBef>
                 <a:spcPts val="0"/>
@@ -9702,7 +9702,7 @@
               </a:spcAft>
             </a:pPr>
             <a:r>
-              <a:rPr sz="1087" b="0" i="0">
+              <a:rPr sz="1050" b="0" i="0">
                 <a:solidFill>
                   <a:srgbClr val="5D6B79"/>
                 </a:solidFill>
@@ -9721,12 +9721,12 @@
         </p:nvSpPr>
         <p:spPr>
           <a:xfrm>
-            <a:off x="4324350" y="3673792"/>
-            <a:ext cx="3543300" cy="1593532"/>
+            <a:off x="4324350" y="3686746"/>
+            <a:ext cx="3543300" cy="1577244"/>
           </a:xfrm>
           <a:prstGeom prst="roundRect">
             <a:avLst>
-              <a:gd name="adj" fmla="val 7172"/>
+              <a:gd name="adj" fmla="val 7246"/>
             </a:avLst>
           </a:prstGeom>
           <a:solidFill>
@@ -9769,8 +9769,8 @@
         </p:nvSpPr>
         <p:spPr>
           <a:xfrm>
-            <a:off x="4505325" y="4292917"/>
-            <a:ext cx="3181350" cy="447675"/>
+            <a:off x="4505325" y="4305871"/>
+            <a:ext cx="3181350" cy="438150"/>
           </a:xfrm>
           <a:prstGeom prst="rect">
             <a:avLst/>
@@ -9785,7 +9785,7 @@
           <a:p>
             <a:pPr algn="ctr">
               <a:lnSpc>
-                <a:spcPts val="3525"/>
+                <a:spcPts val="3450"/>
               </a:lnSpc>
               <a:spcBef>
                 <a:spcPts val="0"/>
@@ -9795,7 +9795,7 @@
               </a:spcAft>
             </a:pPr>
             <a:r>
-              <a:rPr sz="3525" b="1" i="0">
+              <a:rPr sz="3450" b="1" i="0">
                 <a:solidFill>
                   <a:srgbClr val="5F1937"/>
                 </a:solidFill>
@@ -9814,8 +9814,8 @@
         </p:nvSpPr>
         <p:spPr>
           <a:xfrm>
-            <a:off x="4476750" y="4892992"/>
-            <a:ext cx="3238500" cy="193357"/>
+            <a:off x="4476750" y="4886896"/>
+            <a:ext cx="3238500" cy="186594"/>
           </a:xfrm>
           <a:prstGeom prst="rect">
             <a:avLst/>
@@ -9830,7 +9830,7 @@
           <a:p>
             <a:pPr algn="ctr">
               <a:lnSpc>
-                <a:spcPts val="1522"/>
+                <a:spcPts val="1470"/>
               </a:lnSpc>
               <a:spcBef>
                 <a:spcPts val="0"/>
@@ -9840,7 +9840,7 @@
               </a:spcAft>
             </a:pPr>
             <a:r>
-              <a:rPr sz="1087" b="0" i="0">
+              <a:rPr sz="1050" b="0" i="0">
                 <a:solidFill>
                   <a:srgbClr val="5D6B79"/>
                 </a:solidFill>
@@ -9859,12 +9859,12 @@
         </p:nvSpPr>
         <p:spPr>
           <a:xfrm>
-            <a:off x="8039100" y="3673792"/>
-            <a:ext cx="3543300" cy="1593532"/>
+            <a:off x="8039100" y="3686746"/>
+            <a:ext cx="3543300" cy="1577244"/>
           </a:xfrm>
           <a:prstGeom prst="roundRect">
             <a:avLst>
-              <a:gd name="adj" fmla="val 7172"/>
+              <a:gd name="adj" fmla="val 7246"/>
             </a:avLst>
           </a:prstGeom>
           <a:solidFill>
@@ -9907,8 +9907,8 @@
         </p:nvSpPr>
         <p:spPr>
           <a:xfrm>
-            <a:off x="8220075" y="4292917"/>
-            <a:ext cx="3181350" cy="447675"/>
+            <a:off x="8220075" y="4305871"/>
+            <a:ext cx="3181350" cy="438150"/>
           </a:xfrm>
           <a:prstGeom prst="rect">
             <a:avLst/>
@@ -9923,7 +9923,7 @@
           <a:p>
             <a:pPr algn="ctr">
               <a:lnSpc>
-                <a:spcPts val="3525"/>
+                <a:spcPts val="3450"/>
               </a:lnSpc>
               <a:spcBef>
                 <a:spcPts val="0"/>
@@ -9933,7 +9933,7 @@
               </a:spcAft>
             </a:pPr>
             <a:r>
-              <a:rPr sz="3525" b="1" i="0">
+              <a:rPr sz="3450" b="1" i="0">
                 <a:solidFill>
                   <a:srgbClr val="8C5F1B"/>
                 </a:solidFill>
@@ -9952,8 +9952,8 @@
         </p:nvSpPr>
         <p:spPr>
           <a:xfrm>
-            <a:off x="8191500" y="4892992"/>
-            <a:ext cx="3238500" cy="193357"/>
+            <a:off x="8191500" y="4886896"/>
+            <a:ext cx="3238500" cy="186594"/>
           </a:xfrm>
           <a:prstGeom prst="rect">
             <a:avLst/>
@@ -9968,7 +9968,7 @@
           <a:p>
             <a:pPr algn="ctr">
               <a:lnSpc>
-                <a:spcPts val="1522"/>
+                <a:spcPts val="1470"/>
               </a:lnSpc>
               <a:spcBef>
                 <a:spcPts val="0"/>
@@ -9978,7 +9978,7 @@
               </a:spcAft>
             </a:pPr>
             <a:r>
-              <a:rPr sz="1087" b="0" i="0">
+              <a:rPr sz="1050" b="0" i="0">
                 <a:solidFill>
                   <a:srgbClr val="5D6B79"/>
                 </a:solidFill>
@@ -9997,7 +9997,7 @@
         </p:nvSpPr>
         <p:spPr>
           <a:xfrm>
-            <a:off x="7801451" y="2311717"/>
+            <a:off x="7805166" y="2315146"/>
             <a:ext cx="19050" cy="438150"/>
           </a:xfrm>
           <a:prstGeom prst="rect">
@@ -10039,7 +10039,7 @@
         </p:nvCxnSpPr>
         <p:spPr>
           <a:xfrm>
-            <a:off x="7801451" y="2311717"/>
+            <a:off x="7805166" y="2315146"/>
             <a:ext cx="19050" cy="438150"/>
           </a:xfrm>
           <a:prstGeom prst="line">
@@ -10075,7 +10075,7 @@
         </p:nvSpPr>
         <p:spPr>
           <a:xfrm>
-            <a:off x="7801451" y="2730817"/>
+            <a:off x="7805166" y="2734246"/>
             <a:ext cx="19050" cy="438150"/>
           </a:xfrm>
           <a:prstGeom prst="rect">
@@ -10117,7 +10117,7 @@
         </p:nvCxnSpPr>
         <p:spPr>
           <a:xfrm>
-            <a:off x="7801451" y="2730817"/>
+            <a:off x="7805166" y="2734246"/>
             <a:ext cx="19050" cy="438150"/>
           </a:xfrm>
           <a:prstGeom prst="line">
@@ -10153,8 +10153,8 @@
         </p:nvSpPr>
         <p:spPr>
           <a:xfrm>
-            <a:off x="609600" y="6448425"/>
-            <a:ext cx="10972800" cy="219075"/>
+            <a:off x="609600" y="6467475"/>
+            <a:ext cx="10972800" cy="200025"/>
           </a:xfrm>
           <a:prstGeom prst="rect">
             <a:avLst/>
@@ -10195,7 +10195,7 @@
         </p:nvSpPr>
         <p:spPr>
           <a:xfrm>
-            <a:off x="609600" y="6448425"/>
+            <a:off x="609600" y="6467475"/>
             <a:ext cx="10972800" cy="9525"/>
           </a:xfrm>
           <a:prstGeom prst="rect">
@@ -10239,8 +10239,8 @@
         </p:nvSpPr>
         <p:spPr>
           <a:xfrm>
-            <a:off x="609600" y="6534150"/>
-            <a:ext cx="1575625" cy="133350"/>
+            <a:off x="609600" y="6553200"/>
+            <a:ext cx="1512379" cy="114300"/>
           </a:xfrm>
           <a:prstGeom prst="rect">
             <a:avLst/>
@@ -10262,7 +10262,7 @@
               </a:spcAft>
             </a:pPr>
             <a:r>
-              <a:rPr sz="900" b="0" i="0">
+              <a:rPr sz="862" b="0" i="0">
                 <a:solidFill>
                   <a:srgbClr val="5D6B79"/>
                 </a:solidFill>
@@ -10281,8 +10281,8 @@
         </p:nvSpPr>
         <p:spPr>
           <a:xfrm>
-            <a:off x="2270950" y="6534150"/>
-            <a:ext cx="7866316" cy="133350"/>
+            <a:off x="2207704" y="6553200"/>
+            <a:ext cx="7976616" cy="114300"/>
           </a:xfrm>
           <a:prstGeom prst="rect">
             <a:avLst/>
@@ -10304,7 +10304,7 @@
               </a:spcAft>
             </a:pPr>
             <a:r>
-              <a:rPr sz="900" b="0" i="0">
+              <a:rPr sz="862" b="0" i="0">
                 <a:solidFill>
                   <a:srgbClr val="5D6B79"/>
                 </a:solidFill>
@@ -10323,8 +10323,8 @@
         </p:nvSpPr>
         <p:spPr>
           <a:xfrm>
-            <a:off x="10280142" y="6534150"/>
-            <a:ext cx="1035367" cy="133350"/>
+            <a:off x="10327195" y="6553200"/>
+            <a:ext cx="994791" cy="114300"/>
           </a:xfrm>
           <a:prstGeom prst="rect">
             <a:avLst/>
@@ -10346,7 +10346,7 @@
               </a:spcAft>
             </a:pPr>
             <a:r>
-              <a:rPr sz="900" b="0" i="0">
+              <a:rPr sz="862" b="0" i="0">
                 <a:solidFill>
                   <a:srgbClr val="5D6B79"/>
                 </a:solidFill>
@@ -10365,8 +10365,8 @@
         </p:nvSpPr>
         <p:spPr>
           <a:xfrm>
-            <a:off x="11429809" y="6534150"/>
-            <a:ext cx="209740" cy="133350"/>
+            <a:off x="11436286" y="6553200"/>
+            <a:ext cx="203263" cy="114300"/>
           </a:xfrm>
           <a:prstGeom prst="rect">
             <a:avLst/>
@@ -10388,7 +10388,7 @@
               </a:spcAft>
             </a:pPr>
             <a:r>
-              <a:rPr sz="900" b="0" i="0">
+              <a:rPr sz="862" b="0" i="0">
                 <a:solidFill>
                   <a:srgbClr val="5D6B79"/>
                 </a:solidFill>
@@ -10401,7 +10401,7 @@
       </p:sp>
       <p:pic>
         <p:nvPicPr>
-          <p:cNvPr id="43" name="Picture 42" descr="icon0013.png"/>
+          <p:cNvPr id="43" name="Picture 42" descr="icon0014.png"/>
           <p:cNvPicPr>
             <a:picLocks noChangeAspect="1"/>
           </p:cNvPicPr>
@@ -10623,7 +10623,7 @@
         </p:nvSpPr>
         <p:spPr>
           <a:xfrm>
-            <a:off x="609600" y="1460754"/>
+            <a:off x="609600" y="1451229"/>
             <a:ext cx="10972800" cy="2162175"/>
           </a:xfrm>
           <a:prstGeom prst="roundRect">
@@ -10669,8 +10669,8 @@
         </p:nvSpPr>
         <p:spPr>
           <a:xfrm>
-            <a:off x="809625" y="1394079"/>
-            <a:ext cx="4638198" cy="114300"/>
+            <a:off x="809625" y="1384554"/>
+            <a:ext cx="4841271" cy="114300"/>
           </a:xfrm>
           <a:prstGeom prst="rect">
             <a:avLst/>
@@ -10712,7 +10712,7 @@
               </a:spcAft>
             </a:pPr>
             <a:r>
-              <a:rPr sz="825" b="1" i="0" spc="82">
+              <a:rPr sz="862" b="1" i="0" spc="86">
                 <a:solidFill>
                   <a:srgbClr val="5F1937"/>
                 </a:solidFill>
@@ -10731,7 +10731,7 @@
         </p:nvSpPr>
         <p:spPr>
           <a:xfrm>
-            <a:off x="809625" y="1708404"/>
+            <a:off x="809625" y="1698879"/>
             <a:ext cx="3282886" cy="1743075"/>
           </a:xfrm>
           <a:prstGeom prst="roundRect">
@@ -10779,7 +10779,7 @@
         </p:nvSpPr>
         <p:spPr>
           <a:xfrm>
-            <a:off x="942975" y="1822704"/>
+            <a:off x="942975" y="1813179"/>
             <a:ext cx="3016186" cy="190500"/>
           </a:xfrm>
           <a:prstGeom prst="roundRect">
@@ -10824,7 +10824,7 @@
               </a:spcAft>
             </a:pPr>
             <a:r>
-              <a:rPr sz="825" b="1" i="0" spc="74">
+              <a:rPr sz="862" b="1" i="0" spc="78">
                 <a:solidFill>
                   <a:srgbClr val="FFFFFF"/>
                 </a:solidFill>
@@ -10843,7 +10843,7 @@
         </p:nvSpPr>
         <p:spPr>
           <a:xfrm>
-            <a:off x="942975" y="2108454"/>
+            <a:off x="942975" y="2098929"/>
             <a:ext cx="3016186" cy="666750"/>
           </a:xfrm>
           <a:prstGeom prst="rect">
@@ -10859,7 +10859,7 @@
           <a:p>
             <a:pPr algn="l">
               <a:lnSpc>
-                <a:spcPts val="1296"/>
+                <a:spcPts val="1316"/>
               </a:lnSpc>
               <a:spcBef>
                 <a:spcPts val="0"/>
@@ -10869,7 +10869,7 @@
               </a:spcAft>
             </a:pPr>
             <a:r>
-              <a:rPr sz="960" b="0" i="0">
+              <a:rPr sz="975" b="0" i="0">
                 <a:solidFill>
                   <a:srgbClr val="1A2430"/>
                 </a:solidFill>
@@ -10888,7 +10888,7 @@
         </p:nvSpPr>
         <p:spPr>
           <a:xfrm>
-            <a:off x="942975" y="2851404"/>
+            <a:off x="942975" y="2841879"/>
             <a:ext cx="3016186" cy="476250"/>
           </a:xfrm>
           <a:prstGeom prst="rect">
@@ -10922,7 +10922,7 @@
           <a:p>
             <a:pPr algn="l">
               <a:lnSpc>
-                <a:spcPts val="1188"/>
+                <a:spcPts val="1138"/>
               </a:lnSpc>
               <a:spcBef>
                 <a:spcPts val="0"/>
@@ -10932,7 +10932,7 @@
               </a:spcAft>
             </a:pPr>
             <a:r>
-              <a:rPr sz="900" b="1" i="0">
+              <a:rPr sz="862" b="1" i="0">
                 <a:solidFill>
                   <a:srgbClr val="5F1937"/>
                 </a:solidFill>
@@ -10941,7 +10941,7 @@
               <a:t>Gate</a:t>
             </a:r>
             <a:r>
-              <a:rPr sz="900" b="0" i="0">
+              <a:rPr sz="862" b="0" i="0">
                 <a:solidFill>
                   <a:srgbClr val="431127"/>
                 </a:solidFill>
@@ -10960,7 +10960,7 @@
         </p:nvCxnSpPr>
         <p:spPr>
           <a:xfrm>
-            <a:off x="942975" y="2851404"/>
+            <a:off x="942975" y="2841879"/>
             <a:ext cx="3016186" cy="9525"/>
           </a:xfrm>
           <a:prstGeom prst="line">
@@ -11004,7 +11004,7 @@
         </p:blipFill>
         <p:spPr>
           <a:xfrm>
-            <a:off x="4187761" y="2475166"/>
+            <a:off x="4187761" y="2465641"/>
             <a:ext cx="171450" cy="209550"/>
           </a:xfrm>
           <a:prstGeom prst="rect">
@@ -11020,7 +11020,7 @@
         </p:nvSpPr>
         <p:spPr>
           <a:xfrm>
-            <a:off x="4454461" y="1708404"/>
+            <a:off x="4454461" y="1698879"/>
             <a:ext cx="3282981" cy="1743075"/>
           </a:xfrm>
           <a:prstGeom prst="roundRect">
@@ -11068,7 +11068,7 @@
         </p:nvSpPr>
         <p:spPr>
           <a:xfrm>
-            <a:off x="4587811" y="1822704"/>
+            <a:off x="4587811" y="1813179"/>
             <a:ext cx="3016281" cy="190500"/>
           </a:xfrm>
           <a:prstGeom prst="roundRect">
@@ -11113,7 +11113,7 @@
               </a:spcAft>
             </a:pPr>
             <a:r>
-              <a:rPr sz="825" b="1" i="0" spc="74">
+              <a:rPr sz="862" b="1" i="0" spc="78">
                 <a:solidFill>
                   <a:srgbClr val="FFFFFF"/>
                 </a:solidFill>
@@ -11132,7 +11132,7 @@
         </p:nvSpPr>
         <p:spPr>
           <a:xfrm>
-            <a:off x="4587811" y="2108454"/>
+            <a:off x="4587811" y="2098929"/>
             <a:ext cx="3016281" cy="666750"/>
           </a:xfrm>
           <a:prstGeom prst="rect">
@@ -11148,7 +11148,7 @@
           <a:p>
             <a:pPr algn="l">
               <a:lnSpc>
-                <a:spcPts val="1296"/>
+                <a:spcPts val="1316"/>
               </a:lnSpc>
               <a:spcBef>
                 <a:spcPts val="0"/>
@@ -11158,7 +11158,7 @@
               </a:spcAft>
             </a:pPr>
             <a:r>
-              <a:rPr sz="960" b="0" i="0">
+              <a:rPr sz="975" b="0" i="0">
                 <a:solidFill>
                   <a:srgbClr val="1A2430"/>
                 </a:solidFill>
@@ -11177,7 +11177,7 @@
         </p:nvSpPr>
         <p:spPr>
           <a:xfrm>
-            <a:off x="4587811" y="2851404"/>
+            <a:off x="4587811" y="2841879"/>
             <a:ext cx="3016281" cy="476250"/>
           </a:xfrm>
           <a:prstGeom prst="rect">
@@ -11211,7 +11211,7 @@
           <a:p>
             <a:pPr algn="l">
               <a:lnSpc>
-                <a:spcPts val="1188"/>
+                <a:spcPts val="1138"/>
               </a:lnSpc>
               <a:spcBef>
                 <a:spcPts val="0"/>
@@ -11221,7 +11221,7 @@
               </a:spcAft>
             </a:pPr>
             <a:r>
-              <a:rPr sz="900" b="1" i="0">
+              <a:rPr sz="862" b="1" i="0">
                 <a:solidFill>
                   <a:srgbClr val="5F1937"/>
                 </a:solidFill>
@@ -11230,7 +11230,7 @@
               <a:t>Gate</a:t>
             </a:r>
             <a:r>
-              <a:rPr sz="900" b="0" i="0">
+              <a:rPr sz="862" b="0" i="0">
                 <a:solidFill>
                   <a:srgbClr val="431127"/>
                 </a:solidFill>
@@ -11249,7 +11249,7 @@
         </p:nvCxnSpPr>
         <p:spPr>
           <a:xfrm>
-            <a:off x="4587811" y="2851404"/>
+            <a:off x="4587811" y="2841879"/>
             <a:ext cx="3016282" cy="9525"/>
           </a:xfrm>
           <a:prstGeom prst="line">
@@ -11293,7 +11293,7 @@
         </p:blipFill>
         <p:spPr>
           <a:xfrm>
-            <a:off x="7832693" y="2475166"/>
+            <a:off x="7832693" y="2465641"/>
             <a:ext cx="171450" cy="209550"/>
           </a:xfrm>
           <a:prstGeom prst="rect">
@@ -11309,7 +11309,7 @@
         </p:nvSpPr>
         <p:spPr>
           <a:xfrm>
-            <a:off x="8099393" y="1708404"/>
+            <a:off x="8099393" y="1698879"/>
             <a:ext cx="3282981" cy="1743075"/>
           </a:xfrm>
           <a:prstGeom prst="roundRect">
@@ -11357,7 +11357,7 @@
         </p:nvSpPr>
         <p:spPr>
           <a:xfrm>
-            <a:off x="8232743" y="1822704"/>
+            <a:off x="8232743" y="1813179"/>
             <a:ext cx="3016281" cy="190500"/>
           </a:xfrm>
           <a:prstGeom prst="roundRect">
@@ -11402,7 +11402,7 @@
               </a:spcAft>
             </a:pPr>
             <a:r>
-              <a:rPr sz="825" b="1" i="0" spc="74">
+              <a:rPr sz="862" b="1" i="0" spc="78">
                 <a:solidFill>
                   <a:srgbClr val="FFFFFF"/>
                 </a:solidFill>
@@ -11421,7 +11421,7 @@
         </p:nvSpPr>
         <p:spPr>
           <a:xfrm>
-            <a:off x="8232743" y="2108454"/>
+            <a:off x="8232743" y="2098929"/>
             <a:ext cx="3016281" cy="666750"/>
           </a:xfrm>
           <a:prstGeom prst="rect">
@@ -11437,7 +11437,7 @@
           <a:p>
             <a:pPr algn="l">
               <a:lnSpc>
-                <a:spcPts val="1296"/>
+                <a:spcPts val="1316"/>
               </a:lnSpc>
               <a:spcBef>
                 <a:spcPts val="0"/>
@@ -11447,7 +11447,7 @@
               </a:spcAft>
             </a:pPr>
             <a:r>
-              <a:rPr sz="960" b="0" i="0">
+              <a:rPr sz="975" b="0" i="0">
                 <a:solidFill>
                   <a:srgbClr val="1A2430"/>
                 </a:solidFill>
@@ -11466,7 +11466,7 @@
         </p:nvSpPr>
         <p:spPr>
           <a:xfrm>
-            <a:off x="8232743" y="2851404"/>
+            <a:off x="8232743" y="2841879"/>
             <a:ext cx="3016281" cy="476250"/>
           </a:xfrm>
           <a:prstGeom prst="rect">
@@ -11500,7 +11500,7 @@
           <a:p>
             <a:pPr algn="l">
               <a:lnSpc>
-                <a:spcPts val="1188"/>
+                <a:spcPts val="1138"/>
               </a:lnSpc>
               <a:spcBef>
                 <a:spcPts val="0"/>
@@ -11510,7 +11510,7 @@
               </a:spcAft>
             </a:pPr>
             <a:r>
-              <a:rPr sz="900" b="1" i="0">
+              <a:rPr sz="862" b="1" i="0">
                 <a:solidFill>
                   <a:srgbClr val="5F1937"/>
                 </a:solidFill>
@@ -11519,7 +11519,7 @@
               <a:t>Gate</a:t>
             </a:r>
             <a:r>
-              <a:rPr sz="900" b="0" i="0">
+              <a:rPr sz="862" b="0" i="0">
                 <a:solidFill>
                   <a:srgbClr val="431127"/>
                 </a:solidFill>
@@ -11538,7 +11538,7 @@
         </p:nvCxnSpPr>
         <p:spPr>
           <a:xfrm>
-            <a:off x="8232743" y="2851404"/>
+            <a:off x="8232743" y="2841879"/>
             <a:ext cx="3016282" cy="9525"/>
           </a:xfrm>
           <a:prstGeom prst="line">
@@ -11574,12 +11574,12 @@
         </p:nvSpPr>
         <p:spPr>
           <a:xfrm>
-            <a:off x="609600" y="3775329"/>
-            <a:ext cx="10972800" cy="2171700"/>
+            <a:off x="609600" y="3765804"/>
+            <a:ext cx="10972800" cy="2190750"/>
           </a:xfrm>
           <a:prstGeom prst="roundRect">
             <a:avLst>
-              <a:gd name="adj" fmla="val 4385"/>
+              <a:gd name="adj" fmla="val 4347"/>
             </a:avLst>
           </a:prstGeom>
           <a:noFill/>
@@ -11620,8 +11620,8 @@
         </p:nvSpPr>
         <p:spPr>
           <a:xfrm>
-            <a:off x="809625" y="3708654"/>
-            <a:ext cx="2750534" cy="114300"/>
+            <a:off x="809625" y="3699129"/>
+            <a:ext cx="2867787" cy="114300"/>
           </a:xfrm>
           <a:prstGeom prst="rect">
             <a:avLst/>
@@ -11663,7 +11663,7 @@
               </a:spcAft>
             </a:pPr>
             <a:r>
-              <a:rPr sz="825" b="1" i="0" spc="82">
+              <a:rPr sz="862" b="1" i="0" spc="86">
                 <a:solidFill>
                   <a:srgbClr val="5F1937"/>
                 </a:solidFill>
@@ -11682,12 +11682,12 @@
         </p:nvSpPr>
         <p:spPr>
           <a:xfrm>
-            <a:off x="847725" y="4042029"/>
-            <a:ext cx="3409950" cy="1704975"/>
+            <a:off x="847725" y="4032504"/>
+            <a:ext cx="3409950" cy="1724025"/>
           </a:xfrm>
           <a:prstGeom prst="roundRect">
             <a:avLst>
-              <a:gd name="adj" fmla="val 5586"/>
+              <a:gd name="adj" fmla="val 5524"/>
             </a:avLst>
           </a:prstGeom>
           <a:noFill/>
@@ -11728,7 +11728,7 @@
         </p:nvSpPr>
         <p:spPr>
           <a:xfrm>
-            <a:off x="857250" y="4051554"/>
+            <a:off x="857250" y="4042029"/>
             <a:ext cx="3390900" cy="390525"/>
           </a:xfrm>
           <a:prstGeom prst="rect">
@@ -11780,7 +11780,7 @@
         </p:blipFill>
         <p:spPr>
           <a:xfrm>
-            <a:off x="981075" y="4146804"/>
+            <a:off x="981075" y="4137279"/>
             <a:ext cx="200025" cy="200025"/>
           </a:xfrm>
           <a:prstGeom prst="rect">
@@ -11796,8 +11796,8 @@
         </p:nvSpPr>
         <p:spPr>
           <a:xfrm>
-            <a:off x="1266825" y="4165854"/>
-            <a:ext cx="803719" cy="161925"/>
+            <a:off x="1257300" y="4151566"/>
+            <a:ext cx="828484" cy="171450"/>
           </a:xfrm>
           <a:prstGeom prst="rect">
             <a:avLst/>
@@ -11819,7 +11819,7 @@
               </a:spcAft>
             </a:pPr>
             <a:r>
-              <a:rPr sz="1125" b="1" i="0">
+              <a:rPr sz="1162" b="1" i="0">
                 <a:solidFill>
                   <a:srgbClr val="FFFFFF"/>
                 </a:solidFill>
@@ -11838,8 +11838,8 @@
         </p:nvSpPr>
         <p:spPr>
           <a:xfrm>
-            <a:off x="857250" y="4442079"/>
-            <a:ext cx="3390900" cy="647700"/>
+            <a:off x="857250" y="4432554"/>
+            <a:ext cx="3390900" cy="657225"/>
           </a:xfrm>
           <a:prstGeom prst="rect">
             <a:avLst/>
@@ -11880,7 +11880,7 @@
         </p:nvSpPr>
         <p:spPr>
           <a:xfrm>
-            <a:off x="857250" y="4442079"/>
+            <a:off x="857250" y="4432554"/>
             <a:ext cx="3390900" cy="9525"/>
           </a:xfrm>
           <a:prstGeom prst="rect">
@@ -11924,8 +11924,8 @@
         </p:nvSpPr>
         <p:spPr>
           <a:xfrm>
-            <a:off x="981075" y="4537329"/>
-            <a:ext cx="3200400" cy="104775"/>
+            <a:off x="981075" y="4527804"/>
+            <a:ext cx="3200400" cy="114300"/>
           </a:xfrm>
           <a:prstGeom prst="rect">
             <a:avLst/>
@@ -11947,7 +11947,7 @@
               </a:spcAft>
             </a:pPr>
             <a:r>
-              <a:rPr sz="712" b="1" i="0" spc="64">
+              <a:rPr sz="862" b="1" i="0" spc="78">
                 <a:solidFill>
                   <a:srgbClr val="5F1937"/>
                 </a:solidFill>
@@ -11982,7 +11982,7 @@
           <a:p>
             <a:pPr algn="l">
               <a:lnSpc>
-                <a:spcPts val="1306"/>
+                <a:spcPts val="1287"/>
               </a:lnSpc>
               <a:spcBef>
                 <a:spcPts val="0"/>
@@ -11992,7 +11992,7 @@
               </a:spcAft>
             </a:pPr>
             <a:r>
-              <a:rPr sz="989" b="0" i="0">
+              <a:rPr sz="975" b="0" i="0">
                 <a:solidFill>
                   <a:srgbClr val="1A2430"/>
                 </a:solidFill>
@@ -12012,7 +12012,7 @@
         <p:spPr>
           <a:xfrm>
             <a:off x="857250" y="5089779"/>
-            <a:ext cx="3390900" cy="647700"/>
+            <a:ext cx="3390900" cy="657225"/>
           </a:xfrm>
           <a:prstGeom prst="rect">
             <a:avLst/>
@@ -12098,7 +12098,7 @@
         <p:spPr>
           <a:xfrm>
             <a:off x="981075" y="5185029"/>
-            <a:ext cx="3200400" cy="104775"/>
+            <a:ext cx="3200400" cy="114300"/>
           </a:xfrm>
           <a:prstGeom prst="rect">
             <a:avLst/>
@@ -12120,7 +12120,7 @@
               </a:spcAft>
             </a:pPr>
             <a:r>
-              <a:rPr sz="712" b="1" i="0" spc="64">
+              <a:rPr sz="862" b="1" i="0" spc="78">
                 <a:solidFill>
                   <a:srgbClr val="5F1937"/>
                 </a:solidFill>
@@ -12139,7 +12139,7 @@
         </p:nvSpPr>
         <p:spPr>
           <a:xfrm>
-            <a:off x="981075" y="5327904"/>
+            <a:off x="981075" y="5337429"/>
             <a:ext cx="3200400" cy="333375"/>
           </a:xfrm>
           <a:prstGeom prst="rect">
@@ -12155,7 +12155,7 @@
           <a:p>
             <a:pPr algn="l">
               <a:lnSpc>
-                <a:spcPts val="1306"/>
+                <a:spcPts val="1287"/>
               </a:lnSpc>
               <a:spcBef>
                 <a:spcPts val="0"/>
@@ -12165,7 +12165,7 @@
               </a:spcAft>
             </a:pPr>
             <a:r>
-              <a:rPr sz="989" b="0" i="0">
+              <a:rPr sz="975" b="0" i="0">
                 <a:solidFill>
                   <a:srgbClr val="1A2430"/>
                 </a:solidFill>
@@ -12184,12 +12184,12 @@
         </p:nvSpPr>
         <p:spPr>
           <a:xfrm>
-            <a:off x="4391025" y="4042029"/>
-            <a:ext cx="3409950" cy="1704975"/>
+            <a:off x="4391025" y="4032504"/>
+            <a:ext cx="3409950" cy="1724025"/>
           </a:xfrm>
           <a:prstGeom prst="roundRect">
             <a:avLst>
-              <a:gd name="adj" fmla="val 5586"/>
+              <a:gd name="adj" fmla="val 5524"/>
             </a:avLst>
           </a:prstGeom>
           <a:noFill/>
@@ -12230,7 +12230,7 @@
         </p:nvSpPr>
         <p:spPr>
           <a:xfrm>
-            <a:off x="4400550" y="4051554"/>
+            <a:off x="4400550" y="4042029"/>
             <a:ext cx="3390900" cy="390525"/>
           </a:xfrm>
           <a:prstGeom prst="rect">
@@ -12282,7 +12282,7 @@
         </p:blipFill>
         <p:spPr>
           <a:xfrm>
-            <a:off x="4524375" y="4146804"/>
+            <a:off x="4524375" y="4137279"/>
             <a:ext cx="200025" cy="200025"/>
           </a:xfrm>
           <a:prstGeom prst="rect">
@@ -12298,8 +12298,8 @@
         </p:nvSpPr>
         <p:spPr>
           <a:xfrm>
-            <a:off x="4810125" y="4165854"/>
-            <a:ext cx="1010126" cy="161925"/>
+            <a:off x="4800600" y="4151566"/>
+            <a:ext cx="1041844" cy="171450"/>
           </a:xfrm>
           <a:prstGeom prst="rect">
             <a:avLst/>
@@ -12321,7 +12321,7 @@
               </a:spcAft>
             </a:pPr>
             <a:r>
-              <a:rPr sz="1125" b="1" i="0">
+              <a:rPr sz="1162" b="1" i="0">
                 <a:solidFill>
                   <a:srgbClr val="FFFFFF"/>
                 </a:solidFill>
@@ -12340,8 +12340,8 @@
         </p:nvSpPr>
         <p:spPr>
           <a:xfrm>
-            <a:off x="4400550" y="4442079"/>
-            <a:ext cx="3390900" cy="647700"/>
+            <a:off x="4400550" y="4432554"/>
+            <a:ext cx="3390900" cy="657225"/>
           </a:xfrm>
           <a:prstGeom prst="rect">
             <a:avLst/>
@@ -12382,7 +12382,7 @@
         </p:nvSpPr>
         <p:spPr>
           <a:xfrm>
-            <a:off x="4400550" y="4442079"/>
+            <a:off x="4400550" y="4432554"/>
             <a:ext cx="3390900" cy="9525"/>
           </a:xfrm>
           <a:prstGeom prst="rect">
@@ -12426,8 +12426,8 @@
         </p:nvSpPr>
         <p:spPr>
           <a:xfrm>
-            <a:off x="4524375" y="4537329"/>
-            <a:ext cx="3200400" cy="104775"/>
+            <a:off x="4524375" y="4527804"/>
+            <a:ext cx="3200400" cy="114300"/>
           </a:xfrm>
           <a:prstGeom prst="rect">
             <a:avLst/>
@@ -12449,7 +12449,7 @@
               </a:spcAft>
             </a:pPr>
             <a:r>
-              <a:rPr sz="712" b="1" i="0" spc="64">
+              <a:rPr sz="862" b="1" i="0" spc="78">
                 <a:solidFill>
                   <a:srgbClr val="5F1937"/>
                 </a:solidFill>
@@ -12484,7 +12484,7 @@
           <a:p>
             <a:pPr algn="l">
               <a:lnSpc>
-                <a:spcPts val="1306"/>
+                <a:spcPts val="1287"/>
               </a:lnSpc>
               <a:spcBef>
                 <a:spcPts val="0"/>
@@ -12494,7 +12494,7 @@
               </a:spcAft>
             </a:pPr>
             <a:r>
-              <a:rPr sz="989" b="0" i="0">
+              <a:rPr sz="975" b="0" i="0">
                 <a:solidFill>
                   <a:srgbClr val="1A2430"/>
                 </a:solidFill>
@@ -12514,7 +12514,7 @@
         <p:spPr>
           <a:xfrm>
             <a:off x="4400550" y="5089779"/>
-            <a:ext cx="3390900" cy="647700"/>
+            <a:ext cx="3390900" cy="657225"/>
           </a:xfrm>
           <a:prstGeom prst="rect">
             <a:avLst/>
@@ -12600,7 +12600,7 @@
         <p:spPr>
           <a:xfrm>
             <a:off x="4524375" y="5185029"/>
-            <a:ext cx="3200400" cy="104775"/>
+            <a:ext cx="3200400" cy="114300"/>
           </a:xfrm>
           <a:prstGeom prst="rect">
             <a:avLst/>
@@ -12622,7 +12622,7 @@
               </a:spcAft>
             </a:pPr>
             <a:r>
-              <a:rPr sz="712" b="1" i="0" spc="64">
+              <a:rPr sz="862" b="1" i="0" spc="78">
                 <a:solidFill>
                   <a:srgbClr val="5F1937"/>
                 </a:solidFill>
@@ -12641,7 +12641,7 @@
         </p:nvSpPr>
         <p:spPr>
           <a:xfrm>
-            <a:off x="4524375" y="5327904"/>
+            <a:off x="4524375" y="5337429"/>
             <a:ext cx="3200400" cy="333375"/>
           </a:xfrm>
           <a:prstGeom prst="rect">
@@ -12657,7 +12657,7 @@
           <a:p>
             <a:pPr algn="l">
               <a:lnSpc>
-                <a:spcPts val="1306"/>
+                <a:spcPts val="1287"/>
               </a:lnSpc>
               <a:spcBef>
                 <a:spcPts val="0"/>
@@ -12667,7 +12667,7 @@
               </a:spcAft>
             </a:pPr>
             <a:r>
-              <a:rPr sz="989" b="0" i="0">
+              <a:rPr sz="975" b="0" i="0">
                 <a:solidFill>
                   <a:srgbClr val="1A2430"/>
                 </a:solidFill>
@@ -12686,12 +12686,12 @@
         </p:nvSpPr>
         <p:spPr>
           <a:xfrm>
-            <a:off x="7934325" y="4042029"/>
-            <a:ext cx="3409950" cy="1704975"/>
+            <a:off x="7934325" y="4032504"/>
+            <a:ext cx="3409950" cy="1724025"/>
           </a:xfrm>
           <a:prstGeom prst="roundRect">
             <a:avLst>
-              <a:gd name="adj" fmla="val 5586"/>
+              <a:gd name="adj" fmla="val 5524"/>
             </a:avLst>
           </a:prstGeom>
           <a:noFill/>
@@ -12732,7 +12732,7 @@
         </p:nvSpPr>
         <p:spPr>
           <a:xfrm>
-            <a:off x="7943850" y="4051554"/>
+            <a:off x="7943850" y="4042029"/>
             <a:ext cx="3390900" cy="390525"/>
           </a:xfrm>
           <a:prstGeom prst="rect">
@@ -12784,7 +12784,7 @@
         </p:blipFill>
         <p:spPr>
           <a:xfrm>
-            <a:off x="8067675" y="4146804"/>
+            <a:off x="8067675" y="4137279"/>
             <a:ext cx="200025" cy="200025"/>
           </a:xfrm>
           <a:prstGeom prst="rect">
@@ -12800,8 +12800,8 @@
         </p:nvSpPr>
         <p:spPr>
           <a:xfrm>
-            <a:off x="8353425" y="4165854"/>
-            <a:ext cx="1335405" cy="161925"/>
+            <a:off x="8343900" y="4151566"/>
+            <a:ext cx="1378172" cy="171450"/>
           </a:xfrm>
           <a:prstGeom prst="rect">
             <a:avLst/>
@@ -12823,7 +12823,7 @@
               </a:spcAft>
             </a:pPr>
             <a:r>
-              <a:rPr sz="1125" b="1" i="0">
+              <a:rPr sz="1162" b="1" i="0">
                 <a:solidFill>
                   <a:srgbClr val="FFFFFF"/>
                 </a:solidFill>
@@ -12842,8 +12842,8 @@
         </p:nvSpPr>
         <p:spPr>
           <a:xfrm>
-            <a:off x="7943850" y="4442079"/>
-            <a:ext cx="3390900" cy="647700"/>
+            <a:off x="7943850" y="4432554"/>
+            <a:ext cx="3390900" cy="657225"/>
           </a:xfrm>
           <a:prstGeom prst="rect">
             <a:avLst/>
@@ -12884,7 +12884,7 @@
         </p:nvSpPr>
         <p:spPr>
           <a:xfrm>
-            <a:off x="7943850" y="4442079"/>
+            <a:off x="7943850" y="4432554"/>
             <a:ext cx="3390900" cy="9525"/>
           </a:xfrm>
           <a:prstGeom prst="rect">
@@ -12928,8 +12928,8 @@
         </p:nvSpPr>
         <p:spPr>
           <a:xfrm>
-            <a:off x="8067675" y="4537329"/>
-            <a:ext cx="3200400" cy="104775"/>
+            <a:off x="8067675" y="4527804"/>
+            <a:ext cx="3200400" cy="114300"/>
           </a:xfrm>
           <a:prstGeom prst="rect">
             <a:avLst/>
@@ -12951,7 +12951,7 @@
               </a:spcAft>
             </a:pPr>
             <a:r>
-              <a:rPr sz="712" b="1" i="0" spc="64">
+              <a:rPr sz="862" b="1" i="0" spc="78">
                 <a:solidFill>
                   <a:srgbClr val="8C5F1B"/>
                 </a:solidFill>
@@ -12986,7 +12986,7 @@
           <a:p>
             <a:pPr algn="l">
               <a:lnSpc>
-                <a:spcPts val="1306"/>
+                <a:spcPts val="1287"/>
               </a:lnSpc>
               <a:spcBef>
                 <a:spcPts val="0"/>
@@ -12996,7 +12996,7 @@
               </a:spcAft>
             </a:pPr>
             <a:r>
-              <a:rPr sz="989" b="0" i="0">
+              <a:rPr sz="975" b="0" i="0">
                 <a:solidFill>
                   <a:srgbClr val="1A2430"/>
                 </a:solidFill>
@@ -13016,7 +13016,7 @@
         <p:spPr>
           <a:xfrm>
             <a:off x="7943850" y="5089779"/>
-            <a:ext cx="3390900" cy="647700"/>
+            <a:ext cx="3390900" cy="657225"/>
           </a:xfrm>
           <a:prstGeom prst="rect">
             <a:avLst/>
@@ -13102,7 +13102,7 @@
         <p:spPr>
           <a:xfrm>
             <a:off x="8067675" y="5185029"/>
-            <a:ext cx="3200400" cy="104775"/>
+            <a:ext cx="3200400" cy="114300"/>
           </a:xfrm>
           <a:prstGeom prst="rect">
             <a:avLst/>
@@ -13124,7 +13124,7 @@
               </a:spcAft>
             </a:pPr>
             <a:r>
-              <a:rPr sz="712" b="1" i="0" spc="64">
+              <a:rPr sz="862" b="1" i="0" spc="78">
                 <a:solidFill>
                   <a:srgbClr val="8C5F1B"/>
                 </a:solidFill>
@@ -13143,7 +13143,7 @@
         </p:nvSpPr>
         <p:spPr>
           <a:xfrm>
-            <a:off x="8067675" y="5327904"/>
+            <a:off x="8067675" y="5337429"/>
             <a:ext cx="3200400" cy="333375"/>
           </a:xfrm>
           <a:prstGeom prst="rect">
@@ -13159,7 +13159,7 @@
           <a:p>
             <a:pPr algn="l">
               <a:lnSpc>
-                <a:spcPts val="1306"/>
+                <a:spcPts val="1287"/>
               </a:lnSpc>
               <a:spcBef>
                 <a:spcPts val="0"/>
@@ -13169,7 +13169,7 @@
               </a:spcAft>
             </a:pPr>
             <a:r>
-              <a:rPr sz="989" b="0" i="0">
+              <a:rPr sz="975" b="0" i="0">
                 <a:solidFill>
                   <a:srgbClr val="1A2430"/>
                 </a:solidFill>
@@ -13188,8 +13188,8 @@
         </p:nvSpPr>
         <p:spPr>
           <a:xfrm>
-            <a:off x="609600" y="6448425"/>
-            <a:ext cx="10972800" cy="219075"/>
+            <a:off x="609600" y="6467475"/>
+            <a:ext cx="10972800" cy="200025"/>
           </a:xfrm>
           <a:prstGeom prst="rect">
             <a:avLst/>
@@ -13230,7 +13230,7 @@
         </p:nvSpPr>
         <p:spPr>
           <a:xfrm>
-            <a:off x="609600" y="6448425"/>
+            <a:off x="609600" y="6467475"/>
             <a:ext cx="10972800" cy="9525"/>
           </a:xfrm>
           <a:prstGeom prst="rect">
@@ -13274,8 +13274,8 @@
         </p:nvSpPr>
         <p:spPr>
           <a:xfrm>
-            <a:off x="609600" y="6534150"/>
-            <a:ext cx="1575625" cy="133350"/>
+            <a:off x="609600" y="6553200"/>
+            <a:ext cx="1512379" cy="114300"/>
           </a:xfrm>
           <a:prstGeom prst="rect">
             <a:avLst/>
@@ -13297,7 +13297,7 @@
               </a:spcAft>
             </a:pPr>
             <a:r>
-              <a:rPr sz="900" b="0" i="0">
+              <a:rPr sz="862" b="0" i="0">
                 <a:solidFill>
                   <a:srgbClr val="5D6B79"/>
                 </a:solidFill>
@@ -13316,8 +13316,8 @@
         </p:nvSpPr>
         <p:spPr>
           <a:xfrm>
-            <a:off x="2270950" y="6534150"/>
-            <a:ext cx="7866316" cy="133350"/>
+            <a:off x="2207704" y="6553200"/>
+            <a:ext cx="7976616" cy="114300"/>
           </a:xfrm>
           <a:prstGeom prst="rect">
             <a:avLst/>
@@ -13339,7 +13339,7 @@
               </a:spcAft>
             </a:pPr>
             <a:r>
-              <a:rPr sz="900" b="0" i="0">
+              <a:rPr sz="862" b="0" i="0">
                 <a:solidFill>
                   <a:srgbClr val="5D6B79"/>
                 </a:solidFill>
@@ -13358,8 +13358,8 @@
         </p:nvSpPr>
         <p:spPr>
           <a:xfrm>
-            <a:off x="10280142" y="6534150"/>
-            <a:ext cx="1035367" cy="133350"/>
+            <a:off x="10327195" y="6553200"/>
+            <a:ext cx="994791" cy="114300"/>
           </a:xfrm>
           <a:prstGeom prst="rect">
             <a:avLst/>
@@ -13381,7 +13381,7 @@
               </a:spcAft>
             </a:pPr>
             <a:r>
-              <a:rPr sz="900" b="0" i="0">
+              <a:rPr sz="862" b="0" i="0">
                 <a:solidFill>
                   <a:srgbClr val="5D6B79"/>
                 </a:solidFill>
@@ -13400,8 +13400,8 @@
         </p:nvSpPr>
         <p:spPr>
           <a:xfrm>
-            <a:off x="11429809" y="6534150"/>
-            <a:ext cx="209740" cy="133350"/>
+            <a:off x="11436286" y="6553200"/>
+            <a:ext cx="203263" cy="114300"/>
           </a:xfrm>
           <a:prstGeom prst="rect">
             <a:avLst/>
@@ -13423,7 +13423,7 @@
               </a:spcAft>
             </a:pPr>
             <a:r>
-              <a:rPr sz="900" b="0" i="0">
+              <a:rPr sz="862" b="0" i="0">
                 <a:solidFill>
                   <a:srgbClr val="5D6B79"/>
                 </a:solidFill>
@@ -13436,7 +13436,7 @@
       </p:sp>
       <p:pic>
         <p:nvPicPr>
-          <p:cNvPr id="69" name="Picture 68" descr="icon0013.png"/>
+          <p:cNvPr id="69" name="Picture 68" descr="icon0021.png"/>
           <p:cNvPicPr>
             <a:picLocks noChangeAspect="1"/>
           </p:cNvPicPr>
@@ -13528,7 +13528,7 @@
         </p:nvSpPr>
         <p:spPr>
           <a:xfrm>
-            <a:off x="685800" y="1604105"/>
+            <a:off x="685800" y="1603914"/>
             <a:ext cx="10877550" cy="142875"/>
           </a:xfrm>
           <a:prstGeom prst="rect">
@@ -13570,7 +13570,7 @@
         </p:nvSpPr>
         <p:spPr>
           <a:xfrm>
-            <a:off x="685800" y="1947005"/>
+            <a:off x="685800" y="1946814"/>
             <a:ext cx="10820400" cy="972121"/>
           </a:xfrm>
           <a:prstGeom prst="rect">
@@ -13637,7 +13637,7 @@
         </p:nvSpPr>
         <p:spPr>
           <a:xfrm>
-            <a:off x="685800" y="3157251"/>
+            <a:off x="685800" y="3157061"/>
             <a:ext cx="876300" cy="38100"/>
           </a:xfrm>
           <a:prstGeom prst="rect">
@@ -13683,12 +13683,12 @@
         </p:nvSpPr>
         <p:spPr>
           <a:xfrm>
-            <a:off x="685800" y="3481101"/>
-            <a:ext cx="2590800" cy="875252"/>
+            <a:off x="685800" y="3480911"/>
+            <a:ext cx="2590800" cy="868584"/>
           </a:xfrm>
           <a:prstGeom prst="roundRect">
             <a:avLst>
-              <a:gd name="adj" fmla="val 13059"/>
+              <a:gd name="adj" fmla="val 13159"/>
             </a:avLst>
           </a:prstGeom>
           <a:solidFill>
@@ -13733,7 +13733,7 @@
         </p:nvSpPr>
         <p:spPr>
           <a:xfrm>
-            <a:off x="828675" y="3623976"/>
+            <a:off x="828675" y="3623786"/>
             <a:ext cx="2305050" cy="304800"/>
           </a:xfrm>
           <a:prstGeom prst="rect">
@@ -13778,8 +13778,8 @@
         </p:nvSpPr>
         <p:spPr>
           <a:xfrm>
-            <a:off x="800100" y="4033551"/>
-            <a:ext cx="2362200" cy="179927"/>
+            <a:off x="800100" y="4033361"/>
+            <a:ext cx="2362200" cy="173259"/>
           </a:xfrm>
           <a:prstGeom prst="rect">
             <a:avLst/>
@@ -13794,7 +13794,7 @@
           <a:p>
             <a:pPr algn="ctr">
               <a:lnSpc>
-                <a:spcPts val="1417"/>
+                <a:spcPts val="1364"/>
               </a:lnSpc>
               <a:spcBef>
                 <a:spcPts val="0"/>
@@ -13804,7 +13804,7 @@
               </a:spcAft>
             </a:pPr>
             <a:r>
-              <a:rPr sz="1012" b="0" i="0">
+              <a:rPr sz="975" b="0" i="0">
                 <a:solidFill>
                   <a:srgbClr val="D5CED1"/>
                 </a:solidFill>
@@ -13823,12 +13823,12 @@
         </p:nvSpPr>
         <p:spPr>
           <a:xfrm>
-            <a:off x="3429000" y="3481101"/>
-            <a:ext cx="2590800" cy="875252"/>
+            <a:off x="3429000" y="3480911"/>
+            <a:ext cx="2590800" cy="868584"/>
           </a:xfrm>
           <a:prstGeom prst="roundRect">
             <a:avLst>
-              <a:gd name="adj" fmla="val 13059"/>
+              <a:gd name="adj" fmla="val 13159"/>
             </a:avLst>
           </a:prstGeom>
           <a:solidFill>
@@ -13873,7 +13873,7 @@
         </p:nvSpPr>
         <p:spPr>
           <a:xfrm>
-            <a:off x="3571875" y="3623976"/>
+            <a:off x="3571875" y="3623786"/>
             <a:ext cx="2305050" cy="304800"/>
           </a:xfrm>
           <a:prstGeom prst="rect">
@@ -13918,8 +13918,8 @@
         </p:nvSpPr>
         <p:spPr>
           <a:xfrm>
-            <a:off x="3543300" y="4033551"/>
-            <a:ext cx="2362200" cy="179927"/>
+            <a:off x="3543300" y="4033361"/>
+            <a:ext cx="2362200" cy="173259"/>
           </a:xfrm>
           <a:prstGeom prst="rect">
             <a:avLst/>
@@ -13934,7 +13934,7 @@
           <a:p>
             <a:pPr algn="ctr">
               <a:lnSpc>
-                <a:spcPts val="1417"/>
+                <a:spcPts val="1364"/>
               </a:lnSpc>
               <a:spcBef>
                 <a:spcPts val="0"/>
@@ -13944,7 +13944,7 @@
               </a:spcAft>
             </a:pPr>
             <a:r>
-              <a:rPr sz="1012" b="0" i="0">
+              <a:rPr sz="975" b="0" i="0">
                 <a:solidFill>
                   <a:srgbClr val="D5CED1"/>
                 </a:solidFill>
@@ -13963,12 +13963,12 @@
         </p:nvSpPr>
         <p:spPr>
           <a:xfrm>
-            <a:off x="6172200" y="3481101"/>
-            <a:ext cx="2590800" cy="875252"/>
+            <a:off x="6172200" y="3480911"/>
+            <a:ext cx="2590800" cy="868584"/>
           </a:xfrm>
           <a:prstGeom prst="roundRect">
             <a:avLst>
-              <a:gd name="adj" fmla="val 13059"/>
+              <a:gd name="adj" fmla="val 13159"/>
             </a:avLst>
           </a:prstGeom>
           <a:solidFill>
@@ -14013,7 +14013,7 @@
         </p:nvSpPr>
         <p:spPr>
           <a:xfrm>
-            <a:off x="6315075" y="3623976"/>
+            <a:off x="6315075" y="3623786"/>
             <a:ext cx="2305050" cy="304800"/>
           </a:xfrm>
           <a:prstGeom prst="rect">
@@ -14058,8 +14058,8 @@
         </p:nvSpPr>
         <p:spPr>
           <a:xfrm>
-            <a:off x="6286500" y="4033551"/>
-            <a:ext cx="2362200" cy="179927"/>
+            <a:off x="6286500" y="4033361"/>
+            <a:ext cx="2362200" cy="173259"/>
           </a:xfrm>
           <a:prstGeom prst="rect">
             <a:avLst/>
@@ -14074,7 +14074,7 @@
           <a:p>
             <a:pPr algn="ctr">
               <a:lnSpc>
-                <a:spcPts val="1417"/>
+                <a:spcPts val="1364"/>
               </a:lnSpc>
               <a:spcBef>
                 <a:spcPts val="0"/>
@@ -14084,7 +14084,7 @@
               </a:spcAft>
             </a:pPr>
             <a:r>
-              <a:rPr sz="1012" b="0" i="0">
+              <a:rPr sz="975" b="0" i="0">
                 <a:solidFill>
                   <a:srgbClr val="D5CED1"/>
                 </a:solidFill>
@@ -14103,12 +14103,12 @@
         </p:nvSpPr>
         <p:spPr>
           <a:xfrm>
-            <a:off x="8915400" y="3481101"/>
-            <a:ext cx="2590800" cy="875252"/>
+            <a:off x="8915400" y="3480911"/>
+            <a:ext cx="2590800" cy="868584"/>
           </a:xfrm>
           <a:prstGeom prst="roundRect">
             <a:avLst>
-              <a:gd name="adj" fmla="val 13059"/>
+              <a:gd name="adj" fmla="val 13159"/>
             </a:avLst>
           </a:prstGeom>
           <a:solidFill>
@@ -14153,7 +14153,7 @@
         </p:nvSpPr>
         <p:spPr>
           <a:xfrm>
-            <a:off x="9058275" y="3623976"/>
+            <a:off x="9058275" y="3623786"/>
             <a:ext cx="2305050" cy="304800"/>
           </a:xfrm>
           <a:prstGeom prst="rect">
@@ -14198,8 +14198,8 @@
         </p:nvSpPr>
         <p:spPr>
           <a:xfrm>
-            <a:off x="9029700" y="4033551"/>
-            <a:ext cx="2362200" cy="179927"/>
+            <a:off x="9029700" y="4033361"/>
+            <a:ext cx="2362200" cy="173259"/>
           </a:xfrm>
           <a:prstGeom prst="rect">
             <a:avLst/>
@@ -14214,7 +14214,7 @@
           <a:p>
             <a:pPr algn="ctr">
               <a:lnSpc>
-                <a:spcPts val="1417"/>
+                <a:spcPts val="1364"/>
               </a:lnSpc>
               <a:spcBef>
                 <a:spcPts val="0"/>
@@ -14224,7 +14224,7 @@
               </a:spcAft>
             </a:pPr>
             <a:r>
-              <a:rPr sz="1012" b="0" i="0">
+              <a:rPr sz="975" b="0" i="0">
                 <a:solidFill>
                   <a:srgbClr val="D5CED1"/>
                 </a:solidFill>
@@ -14243,8 +14243,8 @@
         </p:nvSpPr>
         <p:spPr>
           <a:xfrm>
-            <a:off x="685800" y="4604004"/>
-            <a:ext cx="3505200" cy="535590"/>
+            <a:off x="685800" y="4597146"/>
+            <a:ext cx="3505200" cy="542639"/>
           </a:xfrm>
           <a:prstGeom prst="rect">
             <a:avLst/>
@@ -14285,7 +14285,7 @@
         </p:nvSpPr>
         <p:spPr>
           <a:xfrm>
-            <a:off x="685800" y="4604004"/>
+            <a:off x="685800" y="4597146"/>
             <a:ext cx="3505200" cy="19050"/>
           </a:xfrm>
           <a:prstGeom prst="rect">
@@ -14329,8 +14329,8 @@
         </p:nvSpPr>
         <p:spPr>
           <a:xfrm>
-            <a:off x="685800" y="4958524"/>
-            <a:ext cx="3505200" cy="430815"/>
+            <a:off x="685800" y="4965477"/>
+            <a:ext cx="3505200" cy="437864"/>
           </a:xfrm>
           <a:prstGeom prst="rect">
             <a:avLst/>
@@ -14345,7 +14345,7 @@
           <a:p>
             <a:pPr algn="l">
               <a:lnSpc>
-                <a:spcPts val="1576"/>
+                <a:spcPts val="1522"/>
               </a:lnSpc>
               <a:spcBef>
                 <a:spcPts val="0"/>
@@ -14355,7 +14355,7 @@
               </a:spcAft>
             </a:pPr>
             <a:r>
-              <a:rPr sz="1087" b="0" i="0">
+              <a:rPr sz="1050" b="0" i="0">
                 <a:solidFill>
                   <a:srgbClr val="EEEBED"/>
                 </a:solidFill>
@@ -14374,8 +14374,8 @@
         </p:nvSpPr>
         <p:spPr>
           <a:xfrm>
-            <a:off x="685800" y="4737354"/>
-            <a:ext cx="3562350" cy="144970"/>
+            <a:off x="685800" y="4740021"/>
+            <a:ext cx="3562350" cy="158781"/>
           </a:xfrm>
           <a:prstGeom prst="rect">
             <a:avLst/>
@@ -14390,7 +14390,7 @@
           <a:p>
             <a:pPr algn="l">
               <a:lnSpc>
-                <a:spcPts val="1141"/>
+                <a:spcPts val="1250"/>
               </a:lnSpc>
               <a:spcBef>
                 <a:spcPts val="0"/>
@@ -14400,7 +14400,7 @@
               </a:spcAft>
             </a:pPr>
             <a:r>
-              <a:rPr sz="787" b="1" i="0" spc="102">
+              <a:rPr sz="862" b="1" i="0" spc="112">
                 <a:solidFill>
                   <a:srgbClr val="B8ACB1"/>
                 </a:solidFill>
@@ -14419,8 +14419,8 @@
         </p:nvSpPr>
         <p:spPr>
           <a:xfrm>
-            <a:off x="4343400" y="4604004"/>
-            <a:ext cx="3505200" cy="535590"/>
+            <a:off x="4343400" y="4597146"/>
+            <a:ext cx="3505200" cy="542639"/>
           </a:xfrm>
           <a:prstGeom prst="rect">
             <a:avLst/>
@@ -14461,7 +14461,7 @@
         </p:nvSpPr>
         <p:spPr>
           <a:xfrm>
-            <a:off x="4343400" y="4604004"/>
+            <a:off x="4343400" y="4597146"/>
             <a:ext cx="3505200" cy="19050"/>
           </a:xfrm>
           <a:prstGeom prst="rect">
@@ -14505,8 +14505,8 @@
         </p:nvSpPr>
         <p:spPr>
           <a:xfrm>
-            <a:off x="4343400" y="4958524"/>
-            <a:ext cx="3505200" cy="430815"/>
+            <a:off x="4343400" y="4965477"/>
+            <a:ext cx="3505200" cy="437864"/>
           </a:xfrm>
           <a:prstGeom prst="rect">
             <a:avLst/>
@@ -14521,7 +14521,7 @@
           <a:p>
             <a:pPr algn="l">
               <a:lnSpc>
-                <a:spcPts val="1576"/>
+                <a:spcPts val="1522"/>
               </a:lnSpc>
               <a:spcBef>
                 <a:spcPts val="0"/>
@@ -14531,7 +14531,7 @@
               </a:spcAft>
             </a:pPr>
             <a:r>
-              <a:rPr sz="1087" b="0" i="0">
+              <a:rPr sz="1050" b="0" i="0">
                 <a:solidFill>
                   <a:srgbClr val="EEEBED"/>
                 </a:solidFill>
@@ -14550,8 +14550,8 @@
         </p:nvSpPr>
         <p:spPr>
           <a:xfrm>
-            <a:off x="4343400" y="4737354"/>
-            <a:ext cx="3562350" cy="144970"/>
+            <a:off x="4343400" y="4740021"/>
+            <a:ext cx="3562350" cy="158781"/>
           </a:xfrm>
           <a:prstGeom prst="rect">
             <a:avLst/>
@@ -14566,7 +14566,7 @@
           <a:p>
             <a:pPr algn="l">
               <a:lnSpc>
-                <a:spcPts val="1141"/>
+                <a:spcPts val="1250"/>
               </a:lnSpc>
               <a:spcBef>
                 <a:spcPts val="0"/>
@@ -14576,7 +14576,7 @@
               </a:spcAft>
             </a:pPr>
             <a:r>
-              <a:rPr sz="787" b="1" i="0" spc="102">
+              <a:rPr sz="862" b="1" i="0" spc="112">
                 <a:solidFill>
                   <a:srgbClr val="B8ACB1"/>
                 </a:solidFill>
@@ -14595,8 +14595,8 @@
         </p:nvSpPr>
         <p:spPr>
           <a:xfrm>
-            <a:off x="8001000" y="4604004"/>
-            <a:ext cx="3505200" cy="535590"/>
+            <a:off x="8001000" y="4597146"/>
+            <a:ext cx="3505200" cy="542639"/>
           </a:xfrm>
           <a:prstGeom prst="rect">
             <a:avLst/>
@@ -14637,7 +14637,7 @@
         </p:nvSpPr>
         <p:spPr>
           <a:xfrm>
-            <a:off x="8001000" y="4604004"/>
+            <a:off x="8001000" y="4597146"/>
             <a:ext cx="3505200" cy="19050"/>
           </a:xfrm>
           <a:prstGeom prst="rect">
@@ -14681,8 +14681,8 @@
         </p:nvSpPr>
         <p:spPr>
           <a:xfrm>
-            <a:off x="8001000" y="4958524"/>
-            <a:ext cx="3505200" cy="430815"/>
+            <a:off x="8001000" y="4965477"/>
+            <a:ext cx="3505200" cy="437864"/>
           </a:xfrm>
           <a:prstGeom prst="rect">
             <a:avLst/>
@@ -14697,7 +14697,7 @@
           <a:p>
             <a:pPr algn="l">
               <a:lnSpc>
-                <a:spcPts val="1576"/>
+                <a:spcPts val="1522"/>
               </a:lnSpc>
               <a:spcBef>
                 <a:spcPts val="0"/>
@@ -14707,7 +14707,7 @@
               </a:spcAft>
             </a:pPr>
             <a:r>
-              <a:rPr sz="1087" b="0" i="0">
+              <a:rPr sz="1050" b="0" i="0">
                 <a:solidFill>
                   <a:srgbClr val="EEEBED"/>
                 </a:solidFill>
@@ -14726,8 +14726,8 @@
         </p:nvSpPr>
         <p:spPr>
           <a:xfrm>
-            <a:off x="8001000" y="4737354"/>
-            <a:ext cx="3562350" cy="144970"/>
+            <a:off x="8001000" y="4740021"/>
+            <a:ext cx="3562350" cy="158781"/>
           </a:xfrm>
           <a:prstGeom prst="rect">
             <a:avLst/>
@@ -14742,7 +14742,7 @@
           <a:p>
             <a:pPr algn="l">
               <a:lnSpc>
-                <a:spcPts val="1141"/>
+                <a:spcPts val="1250"/>
               </a:lnSpc>
               <a:spcBef>
                 <a:spcPts val="0"/>
@@ -14752,7 +14752,7 @@
               </a:spcAft>
             </a:pPr>
             <a:r>
-              <a:rPr sz="787" b="1" i="0" spc="102">
+              <a:rPr sz="862" b="1" i="0" spc="112">
                 <a:solidFill>
                   <a:srgbClr val="B8ACB1"/>
                 </a:solidFill>
@@ -14771,8 +14771,8 @@
         </p:nvSpPr>
         <p:spPr>
           <a:xfrm>
-            <a:off x="609600" y="6448425"/>
-            <a:ext cx="10972800" cy="219075"/>
+            <a:off x="609600" y="6467475"/>
+            <a:ext cx="10972800" cy="200025"/>
           </a:xfrm>
           <a:prstGeom prst="rect">
             <a:avLst/>
@@ -14813,7 +14813,7 @@
         </p:nvSpPr>
         <p:spPr>
           <a:xfrm>
-            <a:off x="609600" y="6448425"/>
+            <a:off x="609600" y="6467475"/>
             <a:ext cx="10972800" cy="9525"/>
           </a:xfrm>
           <a:prstGeom prst="rect">
@@ -14857,8 +14857,8 @@
         </p:nvSpPr>
         <p:spPr>
           <a:xfrm>
-            <a:off x="609600" y="6534150"/>
-            <a:ext cx="1575625" cy="133350"/>
+            <a:off x="609600" y="6553200"/>
+            <a:ext cx="1512379" cy="114300"/>
           </a:xfrm>
           <a:prstGeom prst="rect">
             <a:avLst/>
@@ -14880,7 +14880,7 @@
               </a:spcAft>
             </a:pPr>
             <a:r>
-              <a:rPr sz="900" b="0" i="0">
+              <a:rPr sz="862" b="0" i="0">
                 <a:solidFill>
                   <a:srgbClr val="B0A2A8"/>
                 </a:solidFill>
@@ -14899,8 +14899,8 @@
         </p:nvSpPr>
         <p:spPr>
           <a:xfrm>
-            <a:off x="2270950" y="6534150"/>
-            <a:ext cx="7891653" cy="133350"/>
+            <a:off x="2207704" y="6553200"/>
+            <a:ext cx="8000809" cy="114300"/>
           </a:xfrm>
           <a:prstGeom prst="rect">
             <a:avLst/>
@@ -14922,7 +14922,7 @@
               </a:spcAft>
             </a:pPr>
             <a:r>
-              <a:rPr sz="900" b="0" i="0">
+              <a:rPr sz="862" b="0" i="0">
                 <a:solidFill>
                   <a:srgbClr val="B0A2A8"/>
                 </a:solidFill>
@@ -14941,8 +14941,8 @@
         </p:nvSpPr>
         <p:spPr>
           <a:xfrm>
-            <a:off x="10305478" y="6534150"/>
-            <a:ext cx="1035367" cy="133350"/>
+            <a:off x="10351484" y="6553200"/>
+            <a:ext cx="994791" cy="114300"/>
           </a:xfrm>
           <a:prstGeom prst="rect">
             <a:avLst/>
@@ -14964,7 +14964,7 @@
               </a:spcAft>
             </a:pPr>
             <a:r>
-              <a:rPr sz="900" b="0" i="0">
+              <a:rPr sz="862" b="0" i="0">
                 <a:solidFill>
                   <a:srgbClr val="B0A2A8"/>
                 </a:solidFill>
@@ -14983,8 +14983,8 @@
         </p:nvSpPr>
         <p:spPr>
           <a:xfrm>
-            <a:off x="11455146" y="6534150"/>
-            <a:ext cx="184404" cy="133350"/>
+            <a:off x="11460480" y="6553200"/>
+            <a:ext cx="179070" cy="114300"/>
           </a:xfrm>
           <a:prstGeom prst="rect">
             <a:avLst/>
@@ -15006,7 +15006,7 @@
               </a:spcAft>
             </a:pPr>
             <a:r>
-              <a:rPr sz="900" b="0" i="0">
+              <a:rPr sz="862" b="0" i="0">
                 <a:solidFill>
                   <a:srgbClr val="B0A2A8"/>
                 </a:solidFill>
